--- a/output/wordlabs-ply-3day.pptx
+++ b/output/wordlabs-ply-3day.pptx
@@ -6057,7 +6057,7 @@
                 <a:ea typeface="Calibri" pitchFamily="34" charset="-122"/>
                 <a:cs typeface="Calibri" pitchFamily="34" charset="-120"/>
               </a:rPr>
-              <a:t>comply</a:t>
+              <a:t>reply</a:t>
             </a:r>
             <a:pPr algn="l" indent="0" marL="0">
               <a:buNone/>
@@ -6071,7 +6071,7 @@
                 <a:ea typeface="Calibri" pitchFamily="34" charset="-122"/>
                 <a:cs typeface="Calibri" pitchFamily="34" charset="-120"/>
               </a:rPr>
-              <a:t> with the instructions, or did you forget to </a:t>
+              <a:t> to the letter, and will you </a:t>
             </a:r>
             <a:pPr algn="l" indent="0" marL="0">
               <a:buNone/>
@@ -6088,7 +6088,7 @@
                 <a:ea typeface="Calibri" pitchFamily="34" charset="-122"/>
                 <a:cs typeface="Calibri" pitchFamily="34" charset="-120"/>
               </a:rPr>
-              <a:t>reply</a:t>
+              <a:t>comply</a:t>
             </a:r>
             <a:pPr algn="l" indent="0" marL="0">
               <a:buNone/>
@@ -6102,7 +6102,7 @@
                 <a:ea typeface="Calibri" pitchFamily="34" charset="-122"/>
                 <a:cs typeface="Calibri" pitchFamily="34" charset="-120"/>
               </a:rPr>
-              <a:t> to the message?</a:t>
+              <a:t> with their request?</a:t>
             </a:r>
             <a:endParaRPr lang="en-US" sz="1800" dirty="0"/>
           </a:p>
@@ -6257,7 +6257,7 @@
                 <a:ea typeface="Trebuchet MS" pitchFamily="34" charset="-122"/>
                 <a:cs typeface="Trebuchet MS" pitchFamily="34" charset="-120"/>
               </a:rPr>
-              <a:t>comply</a:t>
+              <a:t>reply</a:t>
             </a:r>
             <a:endParaRPr lang="en-US" sz="1400" dirty="0"/>
           </a:p>
@@ -6385,7 +6385,7 @@
                 <a:ea typeface="Trebuchet MS" pitchFamily="34" charset="-122"/>
                 <a:cs typeface="Trebuchet MS" pitchFamily="34" charset="-120"/>
               </a:rPr>
-              <a:t>reply</a:t>
+              <a:t>comply</a:t>
             </a:r>
             <a:endParaRPr lang="en-US" sz="1400" dirty="0"/>
           </a:p>
@@ -6855,7 +6855,7 @@
                 <a:ea typeface="Trebuchet MS" pitchFamily="34" charset="-122"/>
                 <a:cs typeface="Trebuchet MS" pitchFamily="34" charset="-120"/>
               </a:rPr>
-              <a:t>comply</a:t>
+              <a:t>reply</a:t>
             </a:r>
             <a:endParaRPr lang="en-US" sz="2800" dirty="0"/>
           </a:p>
@@ -7682,7 +7682,7 @@
                 <a:ea typeface="Trebuchet MS" pitchFamily="34" charset="-122"/>
                 <a:cs typeface="Trebuchet MS" pitchFamily="34" charset="-120"/>
               </a:rPr>
-              <a:t>comply</a:t>
+              <a:t>reply</a:t>
             </a:r>
             <a:endParaRPr lang="en-US" sz="2800" dirty="0"/>
           </a:p>
@@ -7821,7 +7821,7 @@
                 <a:ea typeface="Trebuchet MS" pitchFamily="34" charset="-122"/>
                 <a:cs typeface="Trebuchet MS" pitchFamily="34" charset="-120"/>
               </a:rPr>
-              <a:t>com</a:t>
+              <a:t>re</a:t>
             </a:r>
             <a:endParaRPr lang="en-US" sz="1300" dirty="0"/>
           </a:p>
@@ -7860,7 +7860,7 @@
                 <a:ea typeface="Calibri" pitchFamily="34" charset="-122"/>
                 <a:cs typeface="Calibri" pitchFamily="34" charset="-120"/>
               </a:rPr>
-              <a:t>together, fully</a:t>
+              <a:t>again, back</a:t>
             </a:r>
             <a:endParaRPr lang="en-US" sz="850" dirty="0"/>
           </a:p>
@@ -7868,46 +7868,7 @@
       </p:sp>
       <p:sp>
         <p:nvSpPr>
-          <p:cNvPr id="19" name="Text 17"/>
-          <p:cNvSpPr/>
-          <p:nvPr/>
-        </p:nvSpPr>
-        <p:spPr>
-          <a:xfrm>
-            <a:off x="2938272" y="2752344"/>
-            <a:ext cx="1828800" cy="182880"/>
-          </a:xfrm>
-          <a:prstGeom prst="rect">
-            <a:avLst/>
-          </a:prstGeom>
-          <a:noFill/>
-          <a:ln/>
-        </p:spPr>
-        <p:txBody>
-          <a:bodyPr wrap="square" lIns="0" tIns="0" rIns="0" bIns="0" rtlCol="0" anchor="t"/>
-          <a:lstStyle/>
-          <a:p>
-            <a:pPr algn="ctr" indent="0" marL="0">
-              <a:buNone/>
-            </a:pPr>
-            <a:r>
-              <a:rPr lang="en-US" sz="700" i="1" dirty="0">
-                <a:solidFill>
-                  <a:srgbClr val="94A3B8"/>
-                </a:solidFill>
-                <a:latin typeface="Calibri" pitchFamily="34" charset="0"/>
-                <a:ea typeface="Calibri" pitchFamily="34" charset="-122"/>
-                <a:cs typeface="Calibri" pitchFamily="34" charset="-120"/>
-              </a:rPr>
-              <a:t>prefix 'com' intensifies the meaning</a:t>
-            </a:r>
-            <a:endParaRPr lang="en-US" sz="700" dirty="0"/>
-          </a:p>
-        </p:txBody>
-      </p:sp>
-      <p:sp>
-        <p:nvSpPr>
-          <p:cNvPr id="20" name="Shape 18"/>
+          <p:cNvPr id="19" name="Shape 17"/>
           <p:cNvSpPr/>
           <p:nvPr/>
         </p:nvSpPr>
@@ -7941,7 +7902,7 @@
       </p:sp>
       <p:sp>
         <p:nvSpPr>
-          <p:cNvPr id="21" name="Text 19"/>
+          <p:cNvPr id="20" name="Text 18"/>
           <p:cNvSpPr/>
           <p:nvPr/>
         </p:nvSpPr>
@@ -7980,7 +7941,7 @@
       </p:sp>
       <p:sp>
         <p:nvSpPr>
-          <p:cNvPr id="22" name="Text 20"/>
+          <p:cNvPr id="21" name="Text 19"/>
           <p:cNvSpPr/>
           <p:nvPr/>
         </p:nvSpPr>
@@ -8011,7 +7972,7 @@
                 <a:ea typeface="Calibri" pitchFamily="34" charset="-122"/>
                 <a:cs typeface="Calibri" pitchFamily="34" charset="-120"/>
               </a:rPr>
-              <a:t>fold, bend, yield</a:t>
+              <a:t>fold, bend, turn</a:t>
             </a:r>
             <a:endParaRPr lang="en-US" sz="850" dirty="0"/>
           </a:p>
@@ -8019,7 +7980,7 @@
       </p:sp>
       <p:sp>
         <p:nvSpPr>
-          <p:cNvPr id="23" name="Shape 21"/>
+          <p:cNvPr id="22" name="Shape 20"/>
           <p:cNvSpPr/>
           <p:nvPr/>
         </p:nvSpPr>
@@ -8046,7 +8007,7 @@
       </p:sp>
       <p:sp>
         <p:nvSpPr>
-          <p:cNvPr id="24" name="Text 22"/>
+          <p:cNvPr id="23" name="Text 21"/>
           <p:cNvSpPr/>
           <p:nvPr/>
         </p:nvSpPr>
@@ -8085,7 +8046,7 @@
       </p:sp>
       <p:sp>
         <p:nvSpPr>
-          <p:cNvPr id="25" name="Shape 23"/>
+          <p:cNvPr id="24" name="Shape 22"/>
           <p:cNvSpPr/>
           <p:nvPr/>
         </p:nvSpPr>
@@ -8112,7 +8073,7 @@
       </p:sp>
       <p:sp>
         <p:nvSpPr>
-          <p:cNvPr id="26" name="Text 24"/>
+          <p:cNvPr id="25" name="Text 23"/>
           <p:cNvSpPr/>
           <p:nvPr/>
         </p:nvSpPr>
@@ -8151,7 +8112,7 @@
       </p:sp>
       <p:sp>
         <p:nvSpPr>
-          <p:cNvPr id="27" name="Shape 25"/>
+          <p:cNvPr id="26" name="Shape 24"/>
           <p:cNvSpPr/>
           <p:nvPr/>
         </p:nvSpPr>
@@ -8178,7 +8139,7 @@
       </p:sp>
       <p:sp>
         <p:nvSpPr>
-          <p:cNvPr id="28" name="Text 26"/>
+          <p:cNvPr id="27" name="Text 25"/>
           <p:cNvSpPr/>
           <p:nvPr/>
         </p:nvSpPr>
@@ -8217,7 +8178,7 @@
       </p:sp>
       <p:sp>
         <p:nvSpPr>
-          <p:cNvPr id="29" name="Shape 27"/>
+          <p:cNvPr id="28" name="Shape 26"/>
           <p:cNvSpPr/>
           <p:nvPr/>
         </p:nvSpPr>
@@ -8244,7 +8205,7 @@
       </p:sp>
       <p:sp>
         <p:nvSpPr>
-          <p:cNvPr id="30" name="Text 28"/>
+          <p:cNvPr id="29" name="Text 27"/>
           <p:cNvSpPr/>
           <p:nvPr/>
         </p:nvSpPr>
@@ -8706,7 +8667,7 @@
                 <a:ea typeface="Trebuchet MS" pitchFamily="34" charset="-122"/>
                 <a:cs typeface="Trebuchet MS" pitchFamily="34" charset="-120"/>
               </a:rPr>
-              <a:t>comply</a:t>
+              <a:t>reply</a:t>
             </a:r>
             <a:endParaRPr lang="en-US" sz="2800" dirty="0"/>
           </a:p>
@@ -8845,7 +8806,7 @@
                 <a:ea typeface="Trebuchet MS" pitchFamily="34" charset="-122"/>
                 <a:cs typeface="Trebuchet MS" pitchFamily="34" charset="-120"/>
               </a:rPr>
-              <a:t>com</a:t>
+              <a:t>re</a:t>
             </a:r>
             <a:endParaRPr lang="en-US" sz="1300" dirty="0"/>
           </a:p>
@@ -8884,7 +8845,7 @@
                 <a:ea typeface="Calibri" pitchFamily="34" charset="-122"/>
                 <a:cs typeface="Calibri" pitchFamily="34" charset="-120"/>
               </a:rPr>
-              <a:t>together, fully</a:t>
+              <a:t>again, back</a:t>
             </a:r>
             <a:endParaRPr lang="en-US" sz="850" dirty="0"/>
           </a:p>
@@ -8892,46 +8853,7 @@
       </p:sp>
       <p:sp>
         <p:nvSpPr>
-          <p:cNvPr id="19" name="Text 17"/>
-          <p:cNvSpPr/>
-          <p:nvPr/>
-        </p:nvSpPr>
-        <p:spPr>
-          <a:xfrm>
-            <a:off x="2938272" y="2752344"/>
-            <a:ext cx="1828800" cy="182880"/>
-          </a:xfrm>
-          <a:prstGeom prst="rect">
-            <a:avLst/>
-          </a:prstGeom>
-          <a:noFill/>
-          <a:ln/>
-        </p:spPr>
-        <p:txBody>
-          <a:bodyPr wrap="square" lIns="0" tIns="0" rIns="0" bIns="0" rtlCol="0" anchor="t"/>
-          <a:lstStyle/>
-          <a:p>
-            <a:pPr algn="ctr" indent="0" marL="0">
-              <a:buNone/>
-            </a:pPr>
-            <a:r>
-              <a:rPr lang="en-US" sz="700" i="1" dirty="0">
-                <a:solidFill>
-                  <a:srgbClr val="94A3B8"/>
-                </a:solidFill>
-                <a:latin typeface="Calibri" pitchFamily="34" charset="0"/>
-                <a:ea typeface="Calibri" pitchFamily="34" charset="-122"/>
-                <a:cs typeface="Calibri" pitchFamily="34" charset="-120"/>
-              </a:rPr>
-              <a:t>prefix 'com' intensifies the meaning</a:t>
-            </a:r>
-            <a:endParaRPr lang="en-US" sz="700" dirty="0"/>
-          </a:p>
-        </p:txBody>
-      </p:sp>
-      <p:sp>
-        <p:nvSpPr>
-          <p:cNvPr id="20" name="Shape 18"/>
+          <p:cNvPr id="19" name="Shape 17"/>
           <p:cNvSpPr/>
           <p:nvPr/>
         </p:nvSpPr>
@@ -8965,7 +8887,7 @@
       </p:sp>
       <p:sp>
         <p:nvSpPr>
-          <p:cNvPr id="21" name="Text 19"/>
+          <p:cNvPr id="20" name="Text 18"/>
           <p:cNvSpPr/>
           <p:nvPr/>
         </p:nvSpPr>
@@ -9004,7 +8926,7 @@
       </p:sp>
       <p:sp>
         <p:nvSpPr>
-          <p:cNvPr id="22" name="Text 20"/>
+          <p:cNvPr id="21" name="Text 19"/>
           <p:cNvSpPr/>
           <p:nvPr/>
         </p:nvSpPr>
@@ -9035,7 +8957,7 @@
                 <a:ea typeface="Calibri" pitchFamily="34" charset="-122"/>
                 <a:cs typeface="Calibri" pitchFamily="34" charset="-120"/>
               </a:rPr>
-              <a:t>fold, bend, yield</a:t>
+              <a:t>fold, bend, turn</a:t>
             </a:r>
             <a:endParaRPr lang="en-US" sz="850" dirty="0"/>
           </a:p>
@@ -9043,7 +8965,7 @@
       </p:sp>
       <p:sp>
         <p:nvSpPr>
-          <p:cNvPr id="23" name="Shape 21"/>
+          <p:cNvPr id="22" name="Shape 20"/>
           <p:cNvSpPr/>
           <p:nvPr/>
         </p:nvSpPr>
@@ -9070,7 +8992,7 @@
       </p:sp>
       <p:sp>
         <p:nvSpPr>
-          <p:cNvPr id="24" name="Text 22"/>
+          <p:cNvPr id="23" name="Text 21"/>
           <p:cNvSpPr/>
           <p:nvPr/>
         </p:nvSpPr>
@@ -9109,7 +9031,7 @@
       </p:sp>
       <p:sp>
         <p:nvSpPr>
-          <p:cNvPr id="25" name="Shape 23"/>
+          <p:cNvPr id="24" name="Shape 22"/>
           <p:cNvSpPr/>
           <p:nvPr/>
         </p:nvSpPr>
@@ -9136,7 +9058,7 @@
       </p:sp>
       <p:sp>
         <p:nvSpPr>
-          <p:cNvPr id="26" name="Shape 24"/>
+          <p:cNvPr id="25" name="Shape 23"/>
           <p:cNvSpPr/>
           <p:nvPr/>
         </p:nvSpPr>
@@ -9163,7 +9085,7 @@
       </p:sp>
       <p:sp>
         <p:nvSpPr>
-          <p:cNvPr id="27" name="Text 25"/>
+          <p:cNvPr id="26" name="Text 24"/>
           <p:cNvSpPr/>
           <p:nvPr/>
         </p:nvSpPr>
@@ -9194,7 +9116,7 @@
                 <a:ea typeface="Trebuchet MS" pitchFamily="34" charset="-122"/>
                 <a:cs typeface="Trebuchet MS" pitchFamily="34" charset="-120"/>
               </a:rPr>
-              <a:t>com</a:t>
+              <a:t>re</a:t>
             </a:r>
             <a:endParaRPr lang="en-US" sz="1400" dirty="0"/>
           </a:p>
@@ -9202,7 +9124,7 @@
       </p:sp>
       <p:sp>
         <p:nvSpPr>
-          <p:cNvPr id="28" name="Text 26"/>
+          <p:cNvPr id="27" name="Text 25"/>
           <p:cNvSpPr/>
           <p:nvPr/>
         </p:nvSpPr>
@@ -9241,7 +9163,7 @@
       </p:sp>
       <p:sp>
         <p:nvSpPr>
-          <p:cNvPr id="29" name="Shape 27"/>
+          <p:cNvPr id="28" name="Shape 26"/>
           <p:cNvSpPr/>
           <p:nvPr/>
         </p:nvSpPr>
@@ -9268,7 +9190,7 @@
       </p:sp>
       <p:sp>
         <p:nvSpPr>
-          <p:cNvPr id="30" name="Text 28"/>
+          <p:cNvPr id="29" name="Text 27"/>
           <p:cNvSpPr/>
           <p:nvPr/>
         </p:nvSpPr>
@@ -9307,7 +9229,7 @@
       </p:sp>
       <p:sp>
         <p:nvSpPr>
-          <p:cNvPr id="31" name="Shape 29"/>
+          <p:cNvPr id="30" name="Shape 28"/>
           <p:cNvSpPr/>
           <p:nvPr/>
         </p:nvSpPr>
@@ -9334,7 +9256,7 @@
       </p:sp>
       <p:sp>
         <p:nvSpPr>
-          <p:cNvPr id="32" name="Text 30"/>
+          <p:cNvPr id="31" name="Text 29"/>
           <p:cNvSpPr/>
           <p:nvPr/>
         </p:nvSpPr>
@@ -9373,7 +9295,7 @@
       </p:sp>
       <p:sp>
         <p:nvSpPr>
-          <p:cNvPr id="33" name="Shape 31"/>
+          <p:cNvPr id="32" name="Shape 30"/>
           <p:cNvSpPr/>
           <p:nvPr/>
         </p:nvSpPr>
@@ -9400,7 +9322,7 @@
       </p:sp>
       <p:sp>
         <p:nvSpPr>
-          <p:cNvPr id="34" name="Text 32"/>
+          <p:cNvPr id="33" name="Text 31"/>
           <p:cNvSpPr/>
           <p:nvPr/>
         </p:nvSpPr>
@@ -9862,7 +9784,7 @@
                 <a:ea typeface="Trebuchet MS" pitchFamily="34" charset="-122"/>
                 <a:cs typeface="Trebuchet MS" pitchFamily="34" charset="-120"/>
               </a:rPr>
-              <a:t>comply</a:t>
+              <a:t>reply</a:t>
             </a:r>
             <a:endParaRPr lang="en-US" sz="2800" dirty="0"/>
           </a:p>
@@ -10001,7 +9923,7 @@
                 <a:ea typeface="Trebuchet MS" pitchFamily="34" charset="-122"/>
                 <a:cs typeface="Trebuchet MS" pitchFamily="34" charset="-120"/>
               </a:rPr>
-              <a:t>com</a:t>
+              <a:t>re</a:t>
             </a:r>
             <a:endParaRPr lang="en-US" sz="1300" dirty="0"/>
           </a:p>
@@ -10040,7 +9962,7 @@
                 <a:ea typeface="Calibri" pitchFamily="34" charset="-122"/>
                 <a:cs typeface="Calibri" pitchFamily="34" charset="-120"/>
               </a:rPr>
-              <a:t>together, fully</a:t>
+              <a:t>again, back</a:t>
             </a:r>
             <a:endParaRPr lang="en-US" sz="850" dirty="0"/>
           </a:p>
@@ -10048,46 +9970,7 @@
       </p:sp>
       <p:sp>
         <p:nvSpPr>
-          <p:cNvPr id="19" name="Text 17"/>
-          <p:cNvSpPr/>
-          <p:nvPr/>
-        </p:nvSpPr>
-        <p:spPr>
-          <a:xfrm>
-            <a:off x="2938272" y="2752344"/>
-            <a:ext cx="1828800" cy="182880"/>
-          </a:xfrm>
-          <a:prstGeom prst="rect">
-            <a:avLst/>
-          </a:prstGeom>
-          <a:noFill/>
-          <a:ln/>
-        </p:spPr>
-        <p:txBody>
-          <a:bodyPr wrap="square" lIns="0" tIns="0" rIns="0" bIns="0" rtlCol="0" anchor="t"/>
-          <a:lstStyle/>
-          <a:p>
-            <a:pPr algn="ctr" indent="0" marL="0">
-              <a:buNone/>
-            </a:pPr>
-            <a:r>
-              <a:rPr lang="en-US" sz="700" i="1" dirty="0">
-                <a:solidFill>
-                  <a:srgbClr val="94A3B8"/>
-                </a:solidFill>
-                <a:latin typeface="Calibri" pitchFamily="34" charset="0"/>
-                <a:ea typeface="Calibri" pitchFamily="34" charset="-122"/>
-                <a:cs typeface="Calibri" pitchFamily="34" charset="-120"/>
-              </a:rPr>
-              <a:t>prefix 'com' intensifies the meaning</a:t>
-            </a:r>
-            <a:endParaRPr lang="en-US" sz="700" dirty="0"/>
-          </a:p>
-        </p:txBody>
-      </p:sp>
-      <p:sp>
-        <p:nvSpPr>
-          <p:cNvPr id="20" name="Shape 18"/>
+          <p:cNvPr id="19" name="Shape 17"/>
           <p:cNvSpPr/>
           <p:nvPr/>
         </p:nvSpPr>
@@ -10121,7 +10004,7 @@
       </p:sp>
       <p:sp>
         <p:nvSpPr>
-          <p:cNvPr id="21" name="Text 19"/>
+          <p:cNvPr id="20" name="Text 18"/>
           <p:cNvSpPr/>
           <p:nvPr/>
         </p:nvSpPr>
@@ -10160,7 +10043,7 @@
       </p:sp>
       <p:sp>
         <p:nvSpPr>
-          <p:cNvPr id="22" name="Text 20"/>
+          <p:cNvPr id="21" name="Text 19"/>
           <p:cNvSpPr/>
           <p:nvPr/>
         </p:nvSpPr>
@@ -10191,7 +10074,7 @@
                 <a:ea typeface="Calibri" pitchFamily="34" charset="-122"/>
                 <a:cs typeface="Calibri" pitchFamily="34" charset="-120"/>
               </a:rPr>
-              <a:t>fold, bend, yield</a:t>
+              <a:t>fold, bend, turn</a:t>
             </a:r>
             <a:endParaRPr lang="en-US" sz="850" dirty="0"/>
           </a:p>
@@ -10199,7 +10082,7 @@
       </p:sp>
       <p:sp>
         <p:nvSpPr>
-          <p:cNvPr id="23" name="Shape 21"/>
+          <p:cNvPr id="22" name="Shape 20"/>
           <p:cNvSpPr/>
           <p:nvPr/>
         </p:nvSpPr>
@@ -10226,7 +10109,7 @@
       </p:sp>
       <p:sp>
         <p:nvSpPr>
-          <p:cNvPr id="24" name="Text 22"/>
+          <p:cNvPr id="23" name="Text 21"/>
           <p:cNvSpPr/>
           <p:nvPr/>
         </p:nvSpPr>
@@ -10265,7 +10148,7 @@
       </p:sp>
       <p:sp>
         <p:nvSpPr>
-          <p:cNvPr id="25" name="Shape 23"/>
+          <p:cNvPr id="24" name="Shape 22"/>
           <p:cNvSpPr/>
           <p:nvPr/>
         </p:nvSpPr>
@@ -10292,7 +10175,7 @@
       </p:sp>
       <p:sp>
         <p:nvSpPr>
-          <p:cNvPr id="26" name="Shape 24"/>
+          <p:cNvPr id="25" name="Shape 23"/>
           <p:cNvSpPr/>
           <p:nvPr/>
         </p:nvSpPr>
@@ -10319,7 +10202,7 @@
       </p:sp>
       <p:sp>
         <p:nvSpPr>
-          <p:cNvPr id="27" name="Text 25"/>
+          <p:cNvPr id="26" name="Text 24"/>
           <p:cNvSpPr/>
           <p:nvPr/>
         </p:nvSpPr>
@@ -10350,7 +10233,7 @@
                 <a:ea typeface="Trebuchet MS" pitchFamily="34" charset="-122"/>
                 <a:cs typeface="Trebuchet MS" pitchFamily="34" charset="-120"/>
               </a:rPr>
-              <a:t>com</a:t>
+              <a:t>re</a:t>
             </a:r>
             <a:endParaRPr lang="en-US" sz="1400" dirty="0"/>
           </a:p>
@@ -10358,7 +10241,7 @@
       </p:sp>
       <p:sp>
         <p:nvSpPr>
-          <p:cNvPr id="28" name="Text 26"/>
+          <p:cNvPr id="27" name="Text 25"/>
           <p:cNvSpPr/>
           <p:nvPr/>
         </p:nvSpPr>
@@ -10397,7 +10280,7 @@
       </p:sp>
       <p:sp>
         <p:nvSpPr>
-          <p:cNvPr id="29" name="Shape 27"/>
+          <p:cNvPr id="28" name="Shape 26"/>
           <p:cNvSpPr/>
           <p:nvPr/>
         </p:nvSpPr>
@@ -10424,7 +10307,7 @@
       </p:sp>
       <p:sp>
         <p:nvSpPr>
-          <p:cNvPr id="30" name="Text 28"/>
+          <p:cNvPr id="29" name="Text 27"/>
           <p:cNvSpPr/>
           <p:nvPr/>
         </p:nvSpPr>
@@ -10463,7 +10346,7 @@
       </p:sp>
       <p:sp>
         <p:nvSpPr>
-          <p:cNvPr id="31" name="Shape 29"/>
+          <p:cNvPr id="30" name="Shape 28"/>
           <p:cNvSpPr/>
           <p:nvPr/>
         </p:nvSpPr>
@@ -10490,7 +10373,7 @@
       </p:sp>
       <p:sp>
         <p:nvSpPr>
-          <p:cNvPr id="32" name="Text 30"/>
+          <p:cNvPr id="31" name="Text 29"/>
           <p:cNvSpPr/>
           <p:nvPr/>
         </p:nvSpPr>
@@ -10529,22 +10412,49 @@
       </p:sp>
       <p:sp>
         <p:nvSpPr>
+          <p:cNvPr id="32" name="Shape 30"/>
+          <p:cNvSpPr/>
+          <p:nvPr/>
+        </p:nvSpPr>
+        <p:spPr>
+          <a:xfrm>
+            <a:off x="1874520" y="4096512"/>
+            <a:ext cx="6903720" cy="658368"/>
+          </a:xfrm>
+          <a:prstGeom prst="rect">
+            <a:avLst>
+              <a:gd name="adj" fmla="val 8333"/>
+            </a:avLst>
+          </a:prstGeom>
+          <a:solidFill>
+            <a:srgbClr val="FCE7F3"/>
+          </a:solidFill>
+          <a:ln w="12700">
+            <a:solidFill>
+              <a:srgbClr val="DB2777"/>
+            </a:solidFill>
+            <a:prstDash val="solid"/>
+          </a:ln>
+        </p:spPr>
+      </p:sp>
+      <p:sp>
+        <p:nvSpPr>
           <p:cNvPr id="33" name="Shape 31"/>
           <p:cNvSpPr/>
           <p:nvPr/>
         </p:nvSpPr>
         <p:spPr>
           <a:xfrm>
-            <a:off x="1874520" y="4096512"/>
-            <a:ext cx="6903720" cy="804672"/>
+            <a:off x="2427732" y="4169664"/>
+            <a:ext cx="685800" cy="475488"/>
           </a:xfrm>
           <a:prstGeom prst="rect">
             <a:avLst>
-              <a:gd name="adj" fmla="val 6818"/>
+              <a:gd name="adj" fmla="val 7692"/>
             </a:avLst>
           </a:prstGeom>
           <a:solidFill>
-            <a:srgbClr val="FCE7F3"/>
+            <a:srgbClr val="FFFFFF"/>
           </a:solidFill>
           <a:ln w="12700">
             <a:solidFill>
@@ -10556,41 +10466,14 @@
       </p:sp>
       <p:sp>
         <p:nvSpPr>
-          <p:cNvPr id="34" name="Shape 32"/>
-          <p:cNvSpPr/>
-          <p:nvPr/>
-        </p:nvSpPr>
-        <p:spPr>
-          <a:xfrm>
-            <a:off x="2254649" y="4169664"/>
-            <a:ext cx="685800" cy="384048"/>
-          </a:xfrm>
-          <a:prstGeom prst="rect">
-            <a:avLst>
-              <a:gd name="adj" fmla="val 9524"/>
-            </a:avLst>
-          </a:prstGeom>
-          <a:solidFill>
-            <a:srgbClr val="FFFFFF"/>
-          </a:solidFill>
-          <a:ln w="12700">
-            <a:solidFill>
-              <a:srgbClr val="DB2777"/>
-            </a:solidFill>
-            <a:prstDash val="solid"/>
-          </a:ln>
-        </p:spPr>
-      </p:sp>
-      <p:sp>
-        <p:nvSpPr>
-          <p:cNvPr id="35" name="Text 33"/>
-          <p:cNvSpPr/>
-          <p:nvPr/>
-        </p:nvSpPr>
-        <p:spPr>
-          <a:xfrm>
-            <a:off x="2254649" y="4169664"/>
-            <a:ext cx="685800" cy="384048"/>
+          <p:cNvPr id="34" name="Text 32"/>
+          <p:cNvSpPr/>
+          <p:nvPr/>
+        </p:nvSpPr>
+        <p:spPr>
+          <a:xfrm>
+            <a:off x="2427732" y="4169664"/>
+            <a:ext cx="685800" cy="475488"/>
           </a:xfrm>
           <a:prstGeom prst="rect">
             <a:avLst/>
@@ -10614,7 +10497,7 @@
                 <a:ea typeface="Trebuchet MS" pitchFamily="34" charset="-122"/>
                 <a:cs typeface="Trebuchet MS" pitchFamily="34" charset="-120"/>
               </a:rPr>
-              <a:t>c</a:t>
+              <a:t>r</a:t>
             </a:r>
             <a:endParaRPr lang="en-US" sz="900" dirty="0"/>
           </a:p>
@@ -10622,80 +10505,41 @@
       </p:sp>
       <p:sp>
         <p:nvSpPr>
+          <p:cNvPr id="35" name="Shape 33"/>
+          <p:cNvSpPr/>
+          <p:nvPr/>
+        </p:nvSpPr>
+        <p:spPr>
+          <a:xfrm>
+            <a:off x="3639312" y="4169664"/>
+            <a:ext cx="685800" cy="475488"/>
+          </a:xfrm>
+          <a:prstGeom prst="rect">
+            <a:avLst>
+              <a:gd name="adj" fmla="val 7692"/>
+            </a:avLst>
+          </a:prstGeom>
+          <a:solidFill>
+            <a:srgbClr val="FFFFFF"/>
+          </a:solidFill>
+          <a:ln w="12700">
+            <a:solidFill>
+              <a:srgbClr val="DB2777"/>
+            </a:solidFill>
+            <a:prstDash val="solid"/>
+          </a:ln>
+        </p:spPr>
+      </p:sp>
+      <p:sp>
+        <p:nvSpPr>
           <p:cNvPr id="36" name="Text 34"/>
           <p:cNvSpPr/>
           <p:nvPr/>
         </p:nvSpPr>
         <p:spPr>
           <a:xfrm>
-            <a:off x="2254649" y="4572000"/>
-            <a:ext cx="685800" cy="219456"/>
-          </a:xfrm>
-          <a:prstGeom prst="rect">
-            <a:avLst/>
-          </a:prstGeom>
-          <a:noFill/>
-          <a:ln/>
-        </p:spPr>
-        <p:txBody>
-          <a:bodyPr wrap="square" lIns="0" tIns="0" rIns="0" bIns="0" rtlCol="0" anchor="t"/>
-          <a:lstStyle/>
-          <a:p>
-            <a:pPr algn="ctr" indent="0" marL="0">
-              <a:buNone/>
-            </a:pPr>
-            <a:r>
-              <a:rPr lang="en-US" sz="750" i="1" dirty="0">
-                <a:solidFill>
-                  <a:srgbClr val="94A3B8"/>
-                </a:solidFill>
-                <a:latin typeface="Calibri" pitchFamily="34" charset="0"/>
-                <a:ea typeface="Calibri" pitchFamily="34" charset="-122"/>
-                <a:cs typeface="Calibri" pitchFamily="34" charset="-120"/>
-              </a:rPr>
-              <a:t>/k/</a:t>
-            </a:r>
-            <a:endParaRPr lang="en-US" sz="750" dirty="0"/>
-          </a:p>
-        </p:txBody>
-      </p:sp>
-      <p:sp>
-        <p:nvSpPr>
-          <p:cNvPr id="37" name="Shape 35"/>
-          <p:cNvSpPr/>
-          <p:nvPr/>
-        </p:nvSpPr>
-        <p:spPr>
-          <a:xfrm>
-            <a:off x="3293146" y="4169664"/>
-            <a:ext cx="685800" cy="384048"/>
-          </a:xfrm>
-          <a:prstGeom prst="rect">
-            <a:avLst>
-              <a:gd name="adj" fmla="val 9524"/>
-            </a:avLst>
-          </a:prstGeom>
-          <a:solidFill>
-            <a:srgbClr val="FFFFFF"/>
-          </a:solidFill>
-          <a:ln w="12700">
-            <a:solidFill>
-              <a:srgbClr val="DB2777"/>
-            </a:solidFill>
-            <a:prstDash val="solid"/>
-          </a:ln>
-        </p:spPr>
-      </p:sp>
-      <p:sp>
-        <p:nvSpPr>
-          <p:cNvPr id="38" name="Text 36"/>
-          <p:cNvSpPr/>
-          <p:nvPr/>
-        </p:nvSpPr>
-        <p:spPr>
-          <a:xfrm>
-            <a:off x="3293146" y="4169664"/>
-            <a:ext cx="685800" cy="384048"/>
+            <a:off x="3639312" y="4169664"/>
+            <a:ext cx="685800" cy="475488"/>
           </a:xfrm>
           <a:prstGeom prst="rect">
             <a:avLst/>
@@ -10719,7 +10563,7 @@
                 <a:ea typeface="Trebuchet MS" pitchFamily="34" charset="-122"/>
                 <a:cs typeface="Trebuchet MS" pitchFamily="34" charset="-120"/>
               </a:rPr>
-              <a:t>o</a:t>
+              <a:t>e</a:t>
             </a:r>
             <a:endParaRPr lang="en-US" sz="900" dirty="0"/>
           </a:p>
@@ -10727,18 +10571,18 @@
       </p:sp>
       <p:sp>
         <p:nvSpPr>
-          <p:cNvPr id="39" name="Shape 37"/>
-          <p:cNvSpPr/>
-          <p:nvPr/>
-        </p:nvSpPr>
-        <p:spPr>
-          <a:xfrm>
-            <a:off x="4331643" y="4169664"/>
-            <a:ext cx="685800" cy="384048"/>
+          <p:cNvPr id="37" name="Shape 35"/>
+          <p:cNvSpPr/>
+          <p:nvPr/>
+        </p:nvSpPr>
+        <p:spPr>
+          <a:xfrm>
+            <a:off x="4850892" y="4169664"/>
+            <a:ext cx="685800" cy="475488"/>
           </a:xfrm>
           <a:prstGeom prst="rect">
             <a:avLst>
-              <a:gd name="adj" fmla="val 9524"/>
+              <a:gd name="adj" fmla="val 7692"/>
             </a:avLst>
           </a:prstGeom>
           <a:solidFill>
@@ -10754,14 +10598,14 @@
       </p:sp>
       <p:sp>
         <p:nvSpPr>
-          <p:cNvPr id="40" name="Text 38"/>
-          <p:cNvSpPr/>
-          <p:nvPr/>
-        </p:nvSpPr>
-        <p:spPr>
-          <a:xfrm>
-            <a:off x="4331643" y="4169664"/>
-            <a:ext cx="685800" cy="384048"/>
+          <p:cNvPr id="38" name="Text 36"/>
+          <p:cNvSpPr/>
+          <p:nvPr/>
+        </p:nvSpPr>
+        <p:spPr>
+          <a:xfrm>
+            <a:off x="4850892" y="4169664"/>
+            <a:ext cx="685800" cy="475488"/>
           </a:xfrm>
           <a:prstGeom prst="rect">
             <a:avLst/>
@@ -10785,7 +10629,7 @@
                 <a:ea typeface="Trebuchet MS" pitchFamily="34" charset="-122"/>
                 <a:cs typeface="Trebuchet MS" pitchFamily="34" charset="-120"/>
               </a:rPr>
-              <a:t>m</a:t>
+              <a:t>p</a:t>
             </a:r>
             <a:endParaRPr lang="en-US" sz="900" dirty="0"/>
           </a:p>
@@ -10793,18 +10637,18 @@
       </p:sp>
       <p:sp>
         <p:nvSpPr>
-          <p:cNvPr id="41" name="Shape 39"/>
-          <p:cNvSpPr/>
-          <p:nvPr/>
-        </p:nvSpPr>
-        <p:spPr>
-          <a:xfrm>
-            <a:off x="5370141" y="4169664"/>
-            <a:ext cx="685800" cy="384048"/>
+          <p:cNvPr id="39" name="Shape 37"/>
+          <p:cNvSpPr/>
+          <p:nvPr/>
+        </p:nvSpPr>
+        <p:spPr>
+          <a:xfrm>
+            <a:off x="6062472" y="4169664"/>
+            <a:ext cx="685800" cy="475488"/>
           </a:xfrm>
           <a:prstGeom prst="rect">
             <a:avLst>
-              <a:gd name="adj" fmla="val 9524"/>
+              <a:gd name="adj" fmla="val 7692"/>
             </a:avLst>
           </a:prstGeom>
           <a:solidFill>
@@ -10820,14 +10664,14 @@
       </p:sp>
       <p:sp>
         <p:nvSpPr>
-          <p:cNvPr id="42" name="Text 40"/>
-          <p:cNvSpPr/>
-          <p:nvPr/>
-        </p:nvSpPr>
-        <p:spPr>
-          <a:xfrm>
-            <a:off x="5370141" y="4169664"/>
-            <a:ext cx="685800" cy="384048"/>
+          <p:cNvPr id="40" name="Text 38"/>
+          <p:cNvSpPr/>
+          <p:nvPr/>
+        </p:nvSpPr>
+        <p:spPr>
+          <a:xfrm>
+            <a:off x="6062472" y="4169664"/>
+            <a:ext cx="685800" cy="475488"/>
           </a:xfrm>
           <a:prstGeom prst="rect">
             <a:avLst/>
@@ -10851,7 +10695,7 @@
                 <a:ea typeface="Trebuchet MS" pitchFamily="34" charset="-122"/>
                 <a:cs typeface="Trebuchet MS" pitchFamily="34" charset="-120"/>
               </a:rPr>
-              <a:t>p</a:t>
+              <a:t>l</a:t>
             </a:r>
             <a:endParaRPr lang="en-US" sz="900" dirty="0"/>
           </a:p>
@@ -10859,18 +10703,18 @@
       </p:sp>
       <p:sp>
         <p:nvSpPr>
-          <p:cNvPr id="43" name="Shape 41"/>
-          <p:cNvSpPr/>
-          <p:nvPr/>
-        </p:nvSpPr>
-        <p:spPr>
-          <a:xfrm>
-            <a:off x="6408638" y="4169664"/>
-            <a:ext cx="685800" cy="384048"/>
+          <p:cNvPr id="41" name="Shape 39"/>
+          <p:cNvSpPr/>
+          <p:nvPr/>
+        </p:nvSpPr>
+        <p:spPr>
+          <a:xfrm>
+            <a:off x="7274052" y="4169664"/>
+            <a:ext cx="685800" cy="475488"/>
           </a:xfrm>
           <a:prstGeom prst="rect">
             <a:avLst>
-              <a:gd name="adj" fmla="val 9524"/>
+              <a:gd name="adj" fmla="val 7692"/>
             </a:avLst>
           </a:prstGeom>
           <a:solidFill>
@@ -10886,80 +10730,14 @@
       </p:sp>
       <p:sp>
         <p:nvSpPr>
-          <p:cNvPr id="44" name="Text 42"/>
-          <p:cNvSpPr/>
-          <p:nvPr/>
-        </p:nvSpPr>
-        <p:spPr>
-          <a:xfrm>
-            <a:off x="6408638" y="4169664"/>
-            <a:ext cx="685800" cy="384048"/>
-          </a:xfrm>
-          <a:prstGeom prst="rect">
-            <a:avLst/>
-          </a:prstGeom>
-          <a:noFill/>
-          <a:ln/>
-        </p:spPr>
-        <p:txBody>
-          <a:bodyPr wrap="square" lIns="0" tIns="0" rIns="0" bIns="0" rtlCol="0" anchor="ctr"/>
-          <a:lstStyle/>
-          <a:p>
-            <a:pPr algn="ctr" indent="0" marL="0">
-              <a:buNone/>
-            </a:pPr>
-            <a:r>
-              <a:rPr lang="en-US" sz="900" b="1" dirty="0">
-                <a:solidFill>
-                  <a:srgbClr val="9D174D"/>
-                </a:solidFill>
-                <a:latin typeface="Trebuchet MS" pitchFamily="34" charset="0"/>
-                <a:ea typeface="Trebuchet MS" pitchFamily="34" charset="-122"/>
-                <a:cs typeface="Trebuchet MS" pitchFamily="34" charset="-120"/>
-              </a:rPr>
-              <a:t>l</a:t>
-            </a:r>
-            <a:endParaRPr lang="en-US" sz="900" dirty="0"/>
-          </a:p>
-        </p:txBody>
-      </p:sp>
-      <p:sp>
-        <p:nvSpPr>
-          <p:cNvPr id="45" name="Shape 43"/>
-          <p:cNvSpPr/>
-          <p:nvPr/>
-        </p:nvSpPr>
-        <p:spPr>
-          <a:xfrm>
-            <a:off x="7447135" y="4169664"/>
-            <a:ext cx="685800" cy="384048"/>
-          </a:xfrm>
-          <a:prstGeom prst="rect">
-            <a:avLst>
-              <a:gd name="adj" fmla="val 9524"/>
-            </a:avLst>
-          </a:prstGeom>
-          <a:solidFill>
-            <a:srgbClr val="FFFFFF"/>
-          </a:solidFill>
-          <a:ln w="12700">
-            <a:solidFill>
-              <a:srgbClr val="DB2777"/>
-            </a:solidFill>
-            <a:prstDash val="solid"/>
-          </a:ln>
-        </p:spPr>
-      </p:sp>
-      <p:sp>
-        <p:nvSpPr>
-          <p:cNvPr id="46" name="Text 44"/>
-          <p:cNvSpPr/>
-          <p:nvPr/>
-        </p:nvSpPr>
-        <p:spPr>
-          <a:xfrm>
-            <a:off x="7447135" y="4169664"/>
-            <a:ext cx="685800" cy="384048"/>
+          <p:cNvPr id="42" name="Text 40"/>
+          <p:cNvSpPr/>
+          <p:nvPr/>
+        </p:nvSpPr>
+        <p:spPr>
+          <a:xfrm>
+            <a:off x="7274052" y="4169664"/>
+            <a:ext cx="685800" cy="475488"/>
           </a:xfrm>
           <a:prstGeom prst="rect">
             <a:avLst/>
@@ -11414,7 +11192,7 @@
                 <a:ea typeface="Trebuchet MS" pitchFamily="34" charset="-122"/>
                 <a:cs typeface="Trebuchet MS" pitchFamily="34" charset="-120"/>
               </a:rPr>
-              <a:t>reply</a:t>
+              <a:t>comply</a:t>
             </a:r>
             <a:endParaRPr lang="en-US" sz="2800" dirty="0"/>
           </a:p>
@@ -12241,7 +12019,7 @@
                 <a:ea typeface="Trebuchet MS" pitchFamily="34" charset="-122"/>
                 <a:cs typeface="Trebuchet MS" pitchFamily="34" charset="-120"/>
               </a:rPr>
-              <a:t>reply</a:t>
+              <a:t>comply</a:t>
             </a:r>
             <a:endParaRPr lang="en-US" sz="2800" dirty="0"/>
           </a:p>
@@ -12380,7 +12158,7 @@
                 <a:ea typeface="Trebuchet MS" pitchFamily="34" charset="-122"/>
                 <a:cs typeface="Trebuchet MS" pitchFamily="34" charset="-120"/>
               </a:rPr>
-              <a:t>re</a:t>
+              <a:t>com</a:t>
             </a:r>
             <a:endParaRPr lang="en-US" sz="1300" dirty="0"/>
           </a:p>
@@ -12419,7 +12197,7 @@
                 <a:ea typeface="Calibri" pitchFamily="34" charset="-122"/>
                 <a:cs typeface="Calibri" pitchFamily="34" charset="-120"/>
               </a:rPr>
-              <a:t>again, back</a:t>
+              <a:t>together, with</a:t>
             </a:r>
             <a:endParaRPr lang="en-US" sz="850" dirty="0"/>
           </a:p>
@@ -12531,7 +12309,7 @@
                 <a:ea typeface="Calibri" pitchFamily="34" charset="-122"/>
                 <a:cs typeface="Calibri" pitchFamily="34" charset="-120"/>
               </a:rPr>
-              <a:t>fold, bend, yield</a:t>
+              <a:t>fold, bend, turn</a:t>
             </a:r>
             <a:endParaRPr lang="en-US" sz="850" dirty="0"/>
           </a:p>
@@ -13226,7 +13004,7 @@
                 <a:ea typeface="Trebuchet MS" pitchFamily="34" charset="-122"/>
                 <a:cs typeface="Trebuchet MS" pitchFamily="34" charset="-120"/>
               </a:rPr>
-              <a:t>reply</a:t>
+              <a:t>comply</a:t>
             </a:r>
             <a:endParaRPr lang="en-US" sz="2800" dirty="0"/>
           </a:p>
@@ -13365,7 +13143,7 @@
                 <a:ea typeface="Trebuchet MS" pitchFamily="34" charset="-122"/>
                 <a:cs typeface="Trebuchet MS" pitchFamily="34" charset="-120"/>
               </a:rPr>
-              <a:t>re</a:t>
+              <a:t>com</a:t>
             </a:r>
             <a:endParaRPr lang="en-US" sz="1300" dirty="0"/>
           </a:p>
@@ -13404,7 +13182,7 @@
                 <a:ea typeface="Calibri" pitchFamily="34" charset="-122"/>
                 <a:cs typeface="Calibri" pitchFamily="34" charset="-120"/>
               </a:rPr>
-              <a:t>again, back</a:t>
+              <a:t>together, with</a:t>
             </a:r>
             <a:endParaRPr lang="en-US" sz="850" dirty="0"/>
           </a:p>
@@ -13516,7 +13294,7 @@
                 <a:ea typeface="Calibri" pitchFamily="34" charset="-122"/>
                 <a:cs typeface="Calibri" pitchFamily="34" charset="-120"/>
               </a:rPr>
-              <a:t>fold, bend, yield</a:t>
+              <a:t>fold, bend, turn</a:t>
             </a:r>
             <a:endParaRPr lang="en-US" sz="850" dirty="0"/>
           </a:p>
@@ -13675,7 +13453,7 @@
                 <a:ea typeface="Trebuchet MS" pitchFamily="34" charset="-122"/>
                 <a:cs typeface="Trebuchet MS" pitchFamily="34" charset="-120"/>
               </a:rPr>
-              <a:t>re</a:t>
+              <a:t>com</a:t>
             </a:r>
             <a:endParaRPr lang="en-US" sz="1400" dirty="0"/>
           </a:p>
@@ -14608,7 +14386,7 @@
                 <a:ea typeface="Trebuchet MS" pitchFamily="34" charset="-122"/>
                 <a:cs typeface="Trebuchet MS" pitchFamily="34" charset="-120"/>
               </a:rPr>
-              <a:t>reply</a:t>
+              <a:t>comply</a:t>
             </a:r>
             <a:endParaRPr lang="en-US" sz="2800" dirty="0"/>
           </a:p>
@@ -14747,7 +14525,7 @@
                 <a:ea typeface="Trebuchet MS" pitchFamily="34" charset="-122"/>
                 <a:cs typeface="Trebuchet MS" pitchFamily="34" charset="-120"/>
               </a:rPr>
-              <a:t>re</a:t>
+              <a:t>com</a:t>
             </a:r>
             <a:endParaRPr lang="en-US" sz="1300" dirty="0"/>
           </a:p>
@@ -14786,7 +14564,7 @@
                 <a:ea typeface="Calibri" pitchFamily="34" charset="-122"/>
                 <a:cs typeface="Calibri" pitchFamily="34" charset="-120"/>
               </a:rPr>
-              <a:t>again, back</a:t>
+              <a:t>together, with</a:t>
             </a:r>
             <a:endParaRPr lang="en-US" sz="850" dirty="0"/>
           </a:p>
@@ -14898,7 +14676,7 @@
                 <a:ea typeface="Calibri" pitchFamily="34" charset="-122"/>
                 <a:cs typeface="Calibri" pitchFamily="34" charset="-120"/>
               </a:rPr>
-              <a:t>fold, bend, yield</a:t>
+              <a:t>fold, bend, turn</a:t>
             </a:r>
             <a:endParaRPr lang="en-US" sz="850" dirty="0"/>
           </a:p>
@@ -15057,7 +14835,7 @@
                 <a:ea typeface="Trebuchet MS" pitchFamily="34" charset="-122"/>
                 <a:cs typeface="Trebuchet MS" pitchFamily="34" charset="-120"/>
               </a:rPr>
-              <a:t>re</a:t>
+              <a:t>com</a:t>
             </a:r>
             <a:endParaRPr lang="en-US" sz="1400" dirty="0"/>
           </a:p>
@@ -15243,11 +15021,11 @@
         <p:spPr>
           <a:xfrm>
             <a:off x="1874520" y="4096512"/>
-            <a:ext cx="6903720" cy="658368"/>
+            <a:ext cx="6903720" cy="804672"/>
           </a:xfrm>
           <a:prstGeom prst="rect">
             <a:avLst>
-              <a:gd name="adj" fmla="val 8333"/>
+              <a:gd name="adj" fmla="val 6818"/>
             </a:avLst>
           </a:prstGeom>
           <a:solidFill>
@@ -15269,12 +15047,12 @@
         </p:nvSpPr>
         <p:spPr>
           <a:xfrm>
-            <a:off x="2427732" y="4169664"/>
-            <a:ext cx="685800" cy="475488"/>
+            <a:off x="2254649" y="4169664"/>
+            <a:ext cx="685800" cy="384048"/>
           </a:xfrm>
           <a:prstGeom prst="rect">
             <a:avLst>
-              <a:gd name="adj" fmla="val 7692"/>
+              <a:gd name="adj" fmla="val 9524"/>
             </a:avLst>
           </a:prstGeom>
           <a:solidFill>
@@ -15296,8 +15074,8 @@
         </p:nvSpPr>
         <p:spPr>
           <a:xfrm>
-            <a:off x="2427732" y="4169664"/>
-            <a:ext cx="685800" cy="475488"/>
+            <a:off x="2254649" y="4169664"/>
+            <a:ext cx="685800" cy="384048"/>
           </a:xfrm>
           <a:prstGeom prst="rect">
             <a:avLst/>
@@ -15321,7 +15099,7 @@
                 <a:ea typeface="Trebuchet MS" pitchFamily="34" charset="-122"/>
                 <a:cs typeface="Trebuchet MS" pitchFamily="34" charset="-120"/>
               </a:rPr>
-              <a:t>r</a:t>
+              <a:t>c</a:t>
             </a:r>
             <a:endParaRPr lang="en-US" sz="900" dirty="0"/>
           </a:p>
@@ -15329,18 +15107,57 @@
       </p:sp>
       <p:sp>
         <p:nvSpPr>
-          <p:cNvPr id="35" name="Shape 33"/>
-          <p:cNvSpPr/>
-          <p:nvPr/>
-        </p:nvSpPr>
-        <p:spPr>
-          <a:xfrm>
-            <a:off x="3639312" y="4169664"/>
-            <a:ext cx="685800" cy="475488"/>
+          <p:cNvPr id="35" name="Text 33"/>
+          <p:cNvSpPr/>
+          <p:nvPr/>
+        </p:nvSpPr>
+        <p:spPr>
+          <a:xfrm>
+            <a:off x="2254649" y="4572000"/>
+            <a:ext cx="685800" cy="219456"/>
+          </a:xfrm>
+          <a:prstGeom prst="rect">
+            <a:avLst/>
+          </a:prstGeom>
+          <a:noFill/>
+          <a:ln/>
+        </p:spPr>
+        <p:txBody>
+          <a:bodyPr wrap="square" lIns="0" tIns="0" rIns="0" bIns="0" rtlCol="0" anchor="t"/>
+          <a:lstStyle/>
+          <a:p>
+            <a:pPr algn="ctr" indent="0" marL="0">
+              <a:buNone/>
+            </a:pPr>
+            <a:r>
+              <a:rPr lang="en-US" sz="750" i="1" dirty="0">
+                <a:solidFill>
+                  <a:srgbClr val="94A3B8"/>
+                </a:solidFill>
+                <a:latin typeface="Calibri" pitchFamily="34" charset="0"/>
+                <a:ea typeface="Calibri" pitchFamily="34" charset="-122"/>
+                <a:cs typeface="Calibri" pitchFamily="34" charset="-120"/>
+              </a:rPr>
+              <a:t>/k/</a:t>
+            </a:r>
+            <a:endParaRPr lang="en-US" sz="750" dirty="0"/>
+          </a:p>
+        </p:txBody>
+      </p:sp>
+      <p:sp>
+        <p:nvSpPr>
+          <p:cNvPr id="36" name="Shape 34"/>
+          <p:cNvSpPr/>
+          <p:nvPr/>
+        </p:nvSpPr>
+        <p:spPr>
+          <a:xfrm>
+            <a:off x="3293146" y="4169664"/>
+            <a:ext cx="685800" cy="384048"/>
           </a:xfrm>
           <a:prstGeom prst="rect">
             <a:avLst>
-              <a:gd name="adj" fmla="val 7692"/>
+              <a:gd name="adj" fmla="val 9524"/>
             </a:avLst>
           </a:prstGeom>
           <a:solidFill>
@@ -15356,14 +15173,14 @@
       </p:sp>
       <p:sp>
         <p:nvSpPr>
-          <p:cNvPr id="36" name="Text 34"/>
-          <p:cNvSpPr/>
-          <p:nvPr/>
-        </p:nvSpPr>
-        <p:spPr>
-          <a:xfrm>
-            <a:off x="3639312" y="4169664"/>
-            <a:ext cx="685800" cy="475488"/>
+          <p:cNvPr id="37" name="Text 35"/>
+          <p:cNvSpPr/>
+          <p:nvPr/>
+        </p:nvSpPr>
+        <p:spPr>
+          <a:xfrm>
+            <a:off x="3293146" y="4169664"/>
+            <a:ext cx="685800" cy="384048"/>
           </a:xfrm>
           <a:prstGeom prst="rect">
             <a:avLst/>
@@ -15387,7 +15204,7 @@
                 <a:ea typeface="Trebuchet MS" pitchFamily="34" charset="-122"/>
                 <a:cs typeface="Trebuchet MS" pitchFamily="34" charset="-120"/>
               </a:rPr>
-              <a:t>e</a:t>
+              <a:t>o</a:t>
             </a:r>
             <a:endParaRPr lang="en-US" sz="900" dirty="0"/>
           </a:p>
@@ -15395,18 +15212,18 @@
       </p:sp>
       <p:sp>
         <p:nvSpPr>
-          <p:cNvPr id="37" name="Shape 35"/>
-          <p:cNvSpPr/>
-          <p:nvPr/>
-        </p:nvSpPr>
-        <p:spPr>
-          <a:xfrm>
-            <a:off x="4850892" y="4169664"/>
-            <a:ext cx="685800" cy="475488"/>
+          <p:cNvPr id="38" name="Shape 36"/>
+          <p:cNvSpPr/>
+          <p:nvPr/>
+        </p:nvSpPr>
+        <p:spPr>
+          <a:xfrm>
+            <a:off x="4331643" y="4169664"/>
+            <a:ext cx="685800" cy="384048"/>
           </a:xfrm>
           <a:prstGeom prst="rect">
             <a:avLst>
-              <a:gd name="adj" fmla="val 7692"/>
+              <a:gd name="adj" fmla="val 9524"/>
             </a:avLst>
           </a:prstGeom>
           <a:solidFill>
@@ -15422,14 +15239,14 @@
       </p:sp>
       <p:sp>
         <p:nvSpPr>
-          <p:cNvPr id="38" name="Text 36"/>
-          <p:cNvSpPr/>
-          <p:nvPr/>
-        </p:nvSpPr>
-        <p:spPr>
-          <a:xfrm>
-            <a:off x="4850892" y="4169664"/>
-            <a:ext cx="685800" cy="475488"/>
+          <p:cNvPr id="39" name="Text 37"/>
+          <p:cNvSpPr/>
+          <p:nvPr/>
+        </p:nvSpPr>
+        <p:spPr>
+          <a:xfrm>
+            <a:off x="4331643" y="4169664"/>
+            <a:ext cx="685800" cy="384048"/>
           </a:xfrm>
           <a:prstGeom prst="rect">
             <a:avLst/>
@@ -15453,7 +15270,7 @@
                 <a:ea typeface="Trebuchet MS" pitchFamily="34" charset="-122"/>
                 <a:cs typeface="Trebuchet MS" pitchFamily="34" charset="-120"/>
               </a:rPr>
-              <a:t>p</a:t>
+              <a:t>m</a:t>
             </a:r>
             <a:endParaRPr lang="en-US" sz="900" dirty="0"/>
           </a:p>
@@ -15461,18 +15278,18 @@
       </p:sp>
       <p:sp>
         <p:nvSpPr>
-          <p:cNvPr id="39" name="Shape 37"/>
-          <p:cNvSpPr/>
-          <p:nvPr/>
-        </p:nvSpPr>
-        <p:spPr>
-          <a:xfrm>
-            <a:off x="6062472" y="4169664"/>
-            <a:ext cx="685800" cy="475488"/>
+          <p:cNvPr id="40" name="Shape 38"/>
+          <p:cNvSpPr/>
+          <p:nvPr/>
+        </p:nvSpPr>
+        <p:spPr>
+          <a:xfrm>
+            <a:off x="5370141" y="4169664"/>
+            <a:ext cx="685800" cy="384048"/>
           </a:xfrm>
           <a:prstGeom prst="rect">
             <a:avLst>
-              <a:gd name="adj" fmla="val 7692"/>
+              <a:gd name="adj" fmla="val 9524"/>
             </a:avLst>
           </a:prstGeom>
           <a:solidFill>
@@ -15488,14 +15305,14 @@
       </p:sp>
       <p:sp>
         <p:nvSpPr>
-          <p:cNvPr id="40" name="Text 38"/>
-          <p:cNvSpPr/>
-          <p:nvPr/>
-        </p:nvSpPr>
-        <p:spPr>
-          <a:xfrm>
-            <a:off x="6062472" y="4169664"/>
-            <a:ext cx="685800" cy="475488"/>
+          <p:cNvPr id="41" name="Text 39"/>
+          <p:cNvSpPr/>
+          <p:nvPr/>
+        </p:nvSpPr>
+        <p:spPr>
+          <a:xfrm>
+            <a:off x="5370141" y="4169664"/>
+            <a:ext cx="685800" cy="384048"/>
           </a:xfrm>
           <a:prstGeom prst="rect">
             <a:avLst/>
@@ -15519,6 +15336,72 @@
                 <a:ea typeface="Trebuchet MS" pitchFamily="34" charset="-122"/>
                 <a:cs typeface="Trebuchet MS" pitchFamily="34" charset="-120"/>
               </a:rPr>
+              <a:t>p</a:t>
+            </a:r>
+            <a:endParaRPr lang="en-US" sz="900" dirty="0"/>
+          </a:p>
+        </p:txBody>
+      </p:sp>
+      <p:sp>
+        <p:nvSpPr>
+          <p:cNvPr id="42" name="Shape 40"/>
+          <p:cNvSpPr/>
+          <p:nvPr/>
+        </p:nvSpPr>
+        <p:spPr>
+          <a:xfrm>
+            <a:off x="6408638" y="4169664"/>
+            <a:ext cx="685800" cy="384048"/>
+          </a:xfrm>
+          <a:prstGeom prst="rect">
+            <a:avLst>
+              <a:gd name="adj" fmla="val 9524"/>
+            </a:avLst>
+          </a:prstGeom>
+          <a:solidFill>
+            <a:srgbClr val="FFFFFF"/>
+          </a:solidFill>
+          <a:ln w="12700">
+            <a:solidFill>
+              <a:srgbClr val="DB2777"/>
+            </a:solidFill>
+            <a:prstDash val="solid"/>
+          </a:ln>
+        </p:spPr>
+      </p:sp>
+      <p:sp>
+        <p:nvSpPr>
+          <p:cNvPr id="43" name="Text 41"/>
+          <p:cNvSpPr/>
+          <p:nvPr/>
+        </p:nvSpPr>
+        <p:spPr>
+          <a:xfrm>
+            <a:off x="6408638" y="4169664"/>
+            <a:ext cx="685800" cy="384048"/>
+          </a:xfrm>
+          <a:prstGeom prst="rect">
+            <a:avLst/>
+          </a:prstGeom>
+          <a:noFill/>
+          <a:ln/>
+        </p:spPr>
+        <p:txBody>
+          <a:bodyPr wrap="square" lIns="0" tIns="0" rIns="0" bIns="0" rtlCol="0" anchor="ctr"/>
+          <a:lstStyle/>
+          <a:p>
+            <a:pPr algn="ctr" indent="0" marL="0">
+              <a:buNone/>
+            </a:pPr>
+            <a:r>
+              <a:rPr lang="en-US" sz="900" b="1" dirty="0">
+                <a:solidFill>
+                  <a:srgbClr val="9D174D"/>
+                </a:solidFill>
+                <a:latin typeface="Trebuchet MS" pitchFamily="34" charset="0"/>
+                <a:ea typeface="Trebuchet MS" pitchFamily="34" charset="-122"/>
+                <a:cs typeface="Trebuchet MS" pitchFamily="34" charset="-120"/>
+              </a:rPr>
               <a:t>l</a:t>
             </a:r>
             <a:endParaRPr lang="en-US" sz="900" dirty="0"/>
@@ -15527,18 +15410,18 @@
       </p:sp>
       <p:sp>
         <p:nvSpPr>
-          <p:cNvPr id="41" name="Shape 39"/>
-          <p:cNvSpPr/>
-          <p:nvPr/>
-        </p:nvSpPr>
-        <p:spPr>
-          <a:xfrm>
-            <a:off x="7274052" y="4169664"/>
-            <a:ext cx="685800" cy="475488"/>
+          <p:cNvPr id="44" name="Shape 42"/>
+          <p:cNvSpPr/>
+          <p:nvPr/>
+        </p:nvSpPr>
+        <p:spPr>
+          <a:xfrm>
+            <a:off x="7447135" y="4169664"/>
+            <a:ext cx="685800" cy="384048"/>
           </a:xfrm>
           <a:prstGeom prst="rect">
             <a:avLst>
-              <a:gd name="adj" fmla="val 7692"/>
+              <a:gd name="adj" fmla="val 9524"/>
             </a:avLst>
           </a:prstGeom>
           <a:solidFill>
@@ -15554,14 +15437,14 @@
       </p:sp>
       <p:sp>
         <p:nvSpPr>
-          <p:cNvPr id="42" name="Text 40"/>
-          <p:cNvSpPr/>
-          <p:nvPr/>
-        </p:nvSpPr>
-        <p:spPr>
-          <a:xfrm>
-            <a:off x="7274052" y="4169664"/>
-            <a:ext cx="685800" cy="475488"/>
+          <p:cNvPr id="45" name="Text 43"/>
+          <p:cNvSpPr/>
+          <p:nvPr/>
+        </p:nvSpPr>
+        <p:spPr>
+          <a:xfrm>
+            <a:off x="7447135" y="4169664"/>
+            <a:ext cx="685800" cy="384048"/>
           </a:xfrm>
           <a:prstGeom prst="rect">
             <a:avLst/>
@@ -16493,7 +16376,7 @@
                 <a:ea typeface="Trebuchet MS" pitchFamily="34" charset="-122"/>
                 <a:cs typeface="Trebuchet MS" pitchFamily="34" charset="-120"/>
               </a:rPr>
-              <a:t>3</a:t>
+              <a:t>2</a:t>
             </a:r>
             <a:pPr algn="ctr" indent="0" marL="0">
               <a:buNone/>
@@ -16911,7 +16794,7 @@
                 <a:ea typeface="Calibri" pitchFamily="34" charset="-122"/>
                 <a:cs typeface="Calibri" pitchFamily="34" charset="-120"/>
               </a:rPr>
-              <a:t>You must </a:t>
+              <a:t>She had to </a:t>
             </a:r>
             <a:pPr algn="l" indent="0" marL="0">
               <a:buNone/>
@@ -16928,7 +16811,7 @@
                 <a:ea typeface="Calibri" pitchFamily="34" charset="-122"/>
                 <a:cs typeface="Calibri" pitchFamily="34" charset="-120"/>
               </a:rPr>
-              <a:t>comply</a:t>
+              <a:t>apply</a:t>
             </a:r>
             <a:pPr algn="l" indent="0" marL="0">
               <a:buNone/>
@@ -16942,7 +16825,7 @@
                 <a:ea typeface="Calibri" pitchFamily="34" charset="-122"/>
                 <a:cs typeface="Calibri" pitchFamily="34" charset="-120"/>
               </a:rPr>
-              <a:t> with the rules, </a:t>
+              <a:t> for the role, </a:t>
             </a:r>
             <a:pPr algn="l" indent="0" marL="0">
               <a:buNone/>
@@ -16973,7 +16856,7 @@
                 <a:ea typeface="Calibri" pitchFamily="34" charset="-122"/>
                 <a:cs typeface="Calibri" pitchFamily="34" charset="-120"/>
               </a:rPr>
-              <a:t> your own equipment, and </a:t>
+              <a:t> her own equipment, and </a:t>
             </a:r>
             <a:pPr algn="l" indent="0" marL="0">
               <a:buNone/>
@@ -16990,7 +16873,7 @@
                 <a:ea typeface="Calibri" pitchFamily="34" charset="-122"/>
                 <a:cs typeface="Calibri" pitchFamily="34" charset="-120"/>
               </a:rPr>
-              <a:t>apply</a:t>
+              <a:t>imply</a:t>
             </a:r>
             <a:pPr algn="l" indent="0" marL="0">
               <a:buNone/>
@@ -17004,7 +16887,7 @@
                 <a:ea typeface="Calibri" pitchFamily="34" charset="-122"/>
                 <a:cs typeface="Calibri" pitchFamily="34" charset="-120"/>
               </a:rPr>
-              <a:t> for a place before Friday!</a:t>
+              <a:t> nothing about the result.</a:t>
             </a:r>
             <a:endParaRPr lang="en-US" sz="1800" dirty="0"/>
           </a:p>
@@ -17159,7 +17042,7 @@
                 <a:ea typeface="Trebuchet MS" pitchFamily="34" charset="-122"/>
                 <a:cs typeface="Trebuchet MS" pitchFamily="34" charset="-120"/>
               </a:rPr>
-              <a:t>comply</a:t>
+              <a:t>apply</a:t>
             </a:r>
             <a:endParaRPr lang="en-US" sz="1400" dirty="0"/>
           </a:p>
@@ -17415,7 +17298,7 @@
                 <a:ea typeface="Trebuchet MS" pitchFamily="34" charset="-122"/>
                 <a:cs typeface="Trebuchet MS" pitchFamily="34" charset="-120"/>
               </a:rPr>
-              <a:t>apply</a:t>
+              <a:t>imply</a:t>
             </a:r>
             <a:endParaRPr lang="en-US" sz="1400" dirty="0"/>
           </a:p>
@@ -17885,7 +17768,7 @@
                 <a:ea typeface="Trebuchet MS" pitchFamily="34" charset="-122"/>
                 <a:cs typeface="Trebuchet MS" pitchFamily="34" charset="-120"/>
               </a:rPr>
-              <a:t>comply</a:t>
+              <a:t>apply</a:t>
             </a:r>
             <a:endParaRPr lang="en-US" sz="2800" dirty="0"/>
           </a:p>
@@ -18712,7 +18595,7 @@
                 <a:ea typeface="Trebuchet MS" pitchFamily="34" charset="-122"/>
                 <a:cs typeface="Trebuchet MS" pitchFamily="34" charset="-120"/>
               </a:rPr>
-              <a:t>comply</a:t>
+              <a:t>apply</a:t>
             </a:r>
             <a:endParaRPr lang="en-US" sz="2800" dirty="0"/>
           </a:p>
@@ -18851,7 +18734,7 @@
                 <a:ea typeface="Trebuchet MS" pitchFamily="34" charset="-122"/>
                 <a:cs typeface="Trebuchet MS" pitchFamily="34" charset="-120"/>
               </a:rPr>
-              <a:t>com</a:t>
+              <a:t>ap</a:t>
             </a:r>
             <a:endParaRPr lang="en-US" sz="1300" dirty="0"/>
           </a:p>
@@ -18890,7 +18773,7 @@
                 <a:ea typeface="Calibri" pitchFamily="34" charset="-122"/>
                 <a:cs typeface="Calibri" pitchFamily="34" charset="-120"/>
               </a:rPr>
-              <a:t>together, fully</a:t>
+              <a:t>to, towards</a:t>
             </a:r>
             <a:endParaRPr lang="en-US" sz="850" dirty="0"/>
           </a:p>
@@ -18929,7 +18812,7 @@
                 <a:ea typeface="Calibri" pitchFamily="34" charset="-122"/>
                 <a:cs typeface="Calibri" pitchFamily="34" charset="-120"/>
               </a:rPr>
-              <a:t>prefix 'com' intensifies the meaning</a:t>
+              <a:t>ad → ap before 'p'</a:t>
             </a:r>
             <a:endParaRPr lang="en-US" sz="700" dirty="0"/>
           </a:p>
@@ -19041,7 +18924,7 @@
                 <a:ea typeface="Calibri" pitchFamily="34" charset="-122"/>
                 <a:cs typeface="Calibri" pitchFamily="34" charset="-120"/>
               </a:rPr>
-              <a:t>fold, bend, yield</a:t>
+              <a:t>fold, bend, turn</a:t>
             </a:r>
             <a:endParaRPr lang="en-US" sz="850" dirty="0"/>
           </a:p>
@@ -19736,7 +19619,7 @@
                 <a:ea typeface="Trebuchet MS" pitchFamily="34" charset="-122"/>
                 <a:cs typeface="Trebuchet MS" pitchFamily="34" charset="-120"/>
               </a:rPr>
-              <a:t>comply</a:t>
+              <a:t>apply</a:t>
             </a:r>
             <a:endParaRPr lang="en-US" sz="2800" dirty="0"/>
           </a:p>
@@ -19875,7 +19758,7 @@
                 <a:ea typeface="Trebuchet MS" pitchFamily="34" charset="-122"/>
                 <a:cs typeface="Trebuchet MS" pitchFamily="34" charset="-120"/>
               </a:rPr>
-              <a:t>com</a:t>
+              <a:t>ap</a:t>
             </a:r>
             <a:endParaRPr lang="en-US" sz="1300" dirty="0"/>
           </a:p>
@@ -19914,7 +19797,7 @@
                 <a:ea typeface="Calibri" pitchFamily="34" charset="-122"/>
                 <a:cs typeface="Calibri" pitchFamily="34" charset="-120"/>
               </a:rPr>
-              <a:t>together, fully</a:t>
+              <a:t>to, towards</a:t>
             </a:r>
             <a:endParaRPr lang="en-US" sz="850" dirty="0"/>
           </a:p>
@@ -19953,7 +19836,7 @@
                 <a:ea typeface="Calibri" pitchFamily="34" charset="-122"/>
                 <a:cs typeface="Calibri" pitchFamily="34" charset="-120"/>
               </a:rPr>
-              <a:t>prefix 'com' intensifies the meaning</a:t>
+              <a:t>ad → ap before 'p'</a:t>
             </a:r>
             <a:endParaRPr lang="en-US" sz="700" dirty="0"/>
           </a:p>
@@ -20065,7 +19948,7 @@
                 <a:ea typeface="Calibri" pitchFamily="34" charset="-122"/>
                 <a:cs typeface="Calibri" pitchFamily="34" charset="-120"/>
               </a:rPr>
-              <a:t>fold, bend, yield</a:t>
+              <a:t>fold, bend, turn</a:t>
             </a:r>
             <a:endParaRPr lang="en-US" sz="850" dirty="0"/>
           </a:p>
@@ -20224,7 +20107,7 @@
                 <a:ea typeface="Trebuchet MS" pitchFamily="34" charset="-122"/>
                 <a:cs typeface="Trebuchet MS" pitchFamily="34" charset="-120"/>
               </a:rPr>
-              <a:t>com</a:t>
+              <a:t>ap</a:t>
             </a:r>
             <a:endParaRPr lang="en-US" sz="1400" dirty="0"/>
           </a:p>
@@ -20892,7 +20775,7 @@
                 <a:ea typeface="Trebuchet MS" pitchFamily="34" charset="-122"/>
                 <a:cs typeface="Trebuchet MS" pitchFamily="34" charset="-120"/>
               </a:rPr>
-              <a:t>comply</a:t>
+              <a:t>apply</a:t>
             </a:r>
             <a:endParaRPr lang="en-US" sz="2800" dirty="0"/>
           </a:p>
@@ -21031,7 +20914,7 @@
                 <a:ea typeface="Trebuchet MS" pitchFamily="34" charset="-122"/>
                 <a:cs typeface="Trebuchet MS" pitchFamily="34" charset="-120"/>
               </a:rPr>
-              <a:t>com</a:t>
+              <a:t>ap</a:t>
             </a:r>
             <a:endParaRPr lang="en-US" sz="1300" dirty="0"/>
           </a:p>
@@ -21070,7 +20953,7 @@
                 <a:ea typeface="Calibri" pitchFamily="34" charset="-122"/>
                 <a:cs typeface="Calibri" pitchFamily="34" charset="-120"/>
               </a:rPr>
-              <a:t>together, fully</a:t>
+              <a:t>to, towards</a:t>
             </a:r>
             <a:endParaRPr lang="en-US" sz="850" dirty="0"/>
           </a:p>
@@ -21109,7 +20992,7 @@
                 <a:ea typeface="Calibri" pitchFamily="34" charset="-122"/>
                 <a:cs typeface="Calibri" pitchFamily="34" charset="-120"/>
               </a:rPr>
-              <a:t>prefix 'com' intensifies the meaning</a:t>
+              <a:t>ad → ap before 'p'</a:t>
             </a:r>
             <a:endParaRPr lang="en-US" sz="700" dirty="0"/>
           </a:p>
@@ -21221,7 +21104,7 @@
                 <a:ea typeface="Calibri" pitchFamily="34" charset="-122"/>
                 <a:cs typeface="Calibri" pitchFamily="34" charset="-120"/>
               </a:rPr>
-              <a:t>fold, bend, yield</a:t>
+              <a:t>fold, bend, turn</a:t>
             </a:r>
             <a:endParaRPr lang="en-US" sz="850" dirty="0"/>
           </a:p>
@@ -21380,7 +21263,7 @@
                 <a:ea typeface="Trebuchet MS" pitchFamily="34" charset="-122"/>
                 <a:cs typeface="Trebuchet MS" pitchFamily="34" charset="-120"/>
               </a:rPr>
-              <a:t>com</a:t>
+              <a:t>ap</a:t>
             </a:r>
             <a:endParaRPr lang="en-US" sz="1400" dirty="0"/>
           </a:p>
@@ -21566,11 +21449,11 @@
         <p:spPr>
           <a:xfrm>
             <a:off x="1874520" y="4096512"/>
-            <a:ext cx="6903720" cy="804672"/>
+            <a:ext cx="6903720" cy="658368"/>
           </a:xfrm>
           <a:prstGeom prst="rect">
             <a:avLst>
-              <a:gd name="adj" fmla="val 6818"/>
+              <a:gd name="adj" fmla="val 8333"/>
             </a:avLst>
           </a:prstGeom>
           <a:solidFill>
@@ -21592,12 +21475,12 @@
         </p:nvSpPr>
         <p:spPr>
           <a:xfrm>
-            <a:off x="2254649" y="4169664"/>
-            <a:ext cx="685800" cy="384048"/>
+            <a:off x="2670048" y="4169664"/>
+            <a:ext cx="685800" cy="475488"/>
           </a:xfrm>
           <a:prstGeom prst="rect">
             <a:avLst>
-              <a:gd name="adj" fmla="val 9524"/>
+              <a:gd name="adj" fmla="val 7692"/>
             </a:avLst>
           </a:prstGeom>
           <a:solidFill>
@@ -21619,8 +21502,8 @@
         </p:nvSpPr>
         <p:spPr>
           <a:xfrm>
-            <a:off x="2254649" y="4169664"/>
-            <a:ext cx="685800" cy="384048"/>
+            <a:off x="2670048" y="4169664"/>
+            <a:ext cx="685800" cy="475488"/>
           </a:xfrm>
           <a:prstGeom prst="rect">
             <a:avLst/>
@@ -21644,7 +21527,7 @@
                 <a:ea typeface="Trebuchet MS" pitchFamily="34" charset="-122"/>
                 <a:cs typeface="Trebuchet MS" pitchFamily="34" charset="-120"/>
               </a:rPr>
-              <a:t>c</a:t>
+              <a:t>a</a:t>
             </a:r>
             <a:endParaRPr lang="en-US" sz="900" dirty="0"/>
           </a:p>
@@ -21652,57 +21535,18 @@
       </p:sp>
       <p:sp>
         <p:nvSpPr>
-          <p:cNvPr id="36" name="Text 34"/>
-          <p:cNvSpPr/>
-          <p:nvPr/>
-        </p:nvSpPr>
-        <p:spPr>
-          <a:xfrm>
-            <a:off x="2254649" y="4572000"/>
-            <a:ext cx="685800" cy="219456"/>
-          </a:xfrm>
-          <a:prstGeom prst="rect">
-            <a:avLst/>
-          </a:prstGeom>
-          <a:noFill/>
-          <a:ln/>
-        </p:spPr>
-        <p:txBody>
-          <a:bodyPr wrap="square" lIns="0" tIns="0" rIns="0" bIns="0" rtlCol="0" anchor="t"/>
-          <a:lstStyle/>
-          <a:p>
-            <a:pPr algn="ctr" indent="0" marL="0">
-              <a:buNone/>
-            </a:pPr>
-            <a:r>
-              <a:rPr lang="en-US" sz="750" i="1" dirty="0">
-                <a:solidFill>
-                  <a:srgbClr val="94A3B8"/>
-                </a:solidFill>
-                <a:latin typeface="Calibri" pitchFamily="34" charset="0"/>
-                <a:ea typeface="Calibri" pitchFamily="34" charset="-122"/>
-                <a:cs typeface="Calibri" pitchFamily="34" charset="-120"/>
-              </a:rPr>
-              <a:t>/k/</a:t>
-            </a:r>
-            <a:endParaRPr lang="en-US" sz="750" dirty="0"/>
-          </a:p>
-        </p:txBody>
-      </p:sp>
-      <p:sp>
-        <p:nvSpPr>
-          <p:cNvPr id="37" name="Shape 35"/>
-          <p:cNvSpPr/>
-          <p:nvPr/>
-        </p:nvSpPr>
-        <p:spPr>
-          <a:xfrm>
-            <a:off x="3293146" y="4169664"/>
-            <a:ext cx="685800" cy="384048"/>
+          <p:cNvPr id="36" name="Shape 34"/>
+          <p:cNvSpPr/>
+          <p:nvPr/>
+        </p:nvSpPr>
+        <p:spPr>
+          <a:xfrm>
+            <a:off x="4123944" y="4169664"/>
+            <a:ext cx="685800" cy="475488"/>
           </a:xfrm>
           <a:prstGeom prst="rect">
             <a:avLst>
-              <a:gd name="adj" fmla="val 9524"/>
+              <a:gd name="adj" fmla="val 7692"/>
             </a:avLst>
           </a:prstGeom>
           <a:solidFill>
@@ -21718,14 +21562,14 @@
       </p:sp>
       <p:sp>
         <p:nvSpPr>
-          <p:cNvPr id="38" name="Text 36"/>
-          <p:cNvSpPr/>
-          <p:nvPr/>
-        </p:nvSpPr>
-        <p:spPr>
-          <a:xfrm>
-            <a:off x="3293146" y="4169664"/>
-            <a:ext cx="685800" cy="384048"/>
+          <p:cNvPr id="37" name="Text 35"/>
+          <p:cNvSpPr/>
+          <p:nvPr/>
+        </p:nvSpPr>
+        <p:spPr>
+          <a:xfrm>
+            <a:off x="4123944" y="4169664"/>
+            <a:ext cx="685800" cy="475488"/>
           </a:xfrm>
           <a:prstGeom prst="rect">
             <a:avLst/>
@@ -21749,7 +21593,7 @@
                 <a:ea typeface="Trebuchet MS" pitchFamily="34" charset="-122"/>
                 <a:cs typeface="Trebuchet MS" pitchFamily="34" charset="-120"/>
               </a:rPr>
-              <a:t>o</a:t>
+              <a:t>pp</a:t>
             </a:r>
             <a:endParaRPr lang="en-US" sz="900" dirty="0"/>
           </a:p>
@@ -21757,18 +21601,18 @@
       </p:sp>
       <p:sp>
         <p:nvSpPr>
-          <p:cNvPr id="39" name="Shape 37"/>
-          <p:cNvSpPr/>
-          <p:nvPr/>
-        </p:nvSpPr>
-        <p:spPr>
-          <a:xfrm>
-            <a:off x="4331643" y="4169664"/>
-            <a:ext cx="685800" cy="384048"/>
+          <p:cNvPr id="38" name="Shape 36"/>
+          <p:cNvSpPr/>
+          <p:nvPr/>
+        </p:nvSpPr>
+        <p:spPr>
+          <a:xfrm>
+            <a:off x="5577840" y="4169664"/>
+            <a:ext cx="685800" cy="475488"/>
           </a:xfrm>
           <a:prstGeom prst="rect">
             <a:avLst>
-              <a:gd name="adj" fmla="val 9524"/>
+              <a:gd name="adj" fmla="val 7692"/>
             </a:avLst>
           </a:prstGeom>
           <a:solidFill>
@@ -21784,14 +21628,14 @@
       </p:sp>
       <p:sp>
         <p:nvSpPr>
-          <p:cNvPr id="40" name="Text 38"/>
-          <p:cNvSpPr/>
-          <p:nvPr/>
-        </p:nvSpPr>
-        <p:spPr>
-          <a:xfrm>
-            <a:off x="4331643" y="4169664"/>
-            <a:ext cx="685800" cy="384048"/>
+          <p:cNvPr id="39" name="Text 37"/>
+          <p:cNvSpPr/>
+          <p:nvPr/>
+        </p:nvSpPr>
+        <p:spPr>
+          <a:xfrm>
+            <a:off x="5577840" y="4169664"/>
+            <a:ext cx="685800" cy="475488"/>
           </a:xfrm>
           <a:prstGeom prst="rect">
             <a:avLst/>
@@ -21815,7 +21659,7 @@
                 <a:ea typeface="Trebuchet MS" pitchFamily="34" charset="-122"/>
                 <a:cs typeface="Trebuchet MS" pitchFamily="34" charset="-120"/>
               </a:rPr>
-              <a:t>m</a:t>
+              <a:t>l</a:t>
             </a:r>
             <a:endParaRPr lang="en-US" sz="900" dirty="0"/>
           </a:p>
@@ -21823,18 +21667,18 @@
       </p:sp>
       <p:sp>
         <p:nvSpPr>
-          <p:cNvPr id="41" name="Shape 39"/>
-          <p:cNvSpPr/>
-          <p:nvPr/>
-        </p:nvSpPr>
-        <p:spPr>
-          <a:xfrm>
-            <a:off x="5370141" y="4169664"/>
-            <a:ext cx="685800" cy="384048"/>
+          <p:cNvPr id="40" name="Shape 38"/>
+          <p:cNvSpPr/>
+          <p:nvPr/>
+        </p:nvSpPr>
+        <p:spPr>
+          <a:xfrm>
+            <a:off x="7031736" y="4169664"/>
+            <a:ext cx="685800" cy="475488"/>
           </a:xfrm>
           <a:prstGeom prst="rect">
             <a:avLst>
-              <a:gd name="adj" fmla="val 9524"/>
+              <a:gd name="adj" fmla="val 7692"/>
             </a:avLst>
           </a:prstGeom>
           <a:solidFill>
@@ -21850,146 +21694,14 @@
       </p:sp>
       <p:sp>
         <p:nvSpPr>
-          <p:cNvPr id="42" name="Text 40"/>
-          <p:cNvSpPr/>
-          <p:nvPr/>
-        </p:nvSpPr>
-        <p:spPr>
-          <a:xfrm>
-            <a:off x="5370141" y="4169664"/>
-            <a:ext cx="685800" cy="384048"/>
-          </a:xfrm>
-          <a:prstGeom prst="rect">
-            <a:avLst/>
-          </a:prstGeom>
-          <a:noFill/>
-          <a:ln/>
-        </p:spPr>
-        <p:txBody>
-          <a:bodyPr wrap="square" lIns="0" tIns="0" rIns="0" bIns="0" rtlCol="0" anchor="ctr"/>
-          <a:lstStyle/>
-          <a:p>
-            <a:pPr algn="ctr" indent="0" marL="0">
-              <a:buNone/>
-            </a:pPr>
-            <a:r>
-              <a:rPr lang="en-US" sz="900" b="1" dirty="0">
-                <a:solidFill>
-                  <a:srgbClr val="9D174D"/>
-                </a:solidFill>
-                <a:latin typeface="Trebuchet MS" pitchFamily="34" charset="0"/>
-                <a:ea typeface="Trebuchet MS" pitchFamily="34" charset="-122"/>
-                <a:cs typeface="Trebuchet MS" pitchFamily="34" charset="-120"/>
-              </a:rPr>
-              <a:t>p</a:t>
-            </a:r>
-            <a:endParaRPr lang="en-US" sz="900" dirty="0"/>
-          </a:p>
-        </p:txBody>
-      </p:sp>
-      <p:sp>
-        <p:nvSpPr>
-          <p:cNvPr id="43" name="Shape 41"/>
-          <p:cNvSpPr/>
-          <p:nvPr/>
-        </p:nvSpPr>
-        <p:spPr>
-          <a:xfrm>
-            <a:off x="6408638" y="4169664"/>
-            <a:ext cx="685800" cy="384048"/>
-          </a:xfrm>
-          <a:prstGeom prst="rect">
-            <a:avLst>
-              <a:gd name="adj" fmla="val 9524"/>
-            </a:avLst>
-          </a:prstGeom>
-          <a:solidFill>
-            <a:srgbClr val="FFFFFF"/>
-          </a:solidFill>
-          <a:ln w="12700">
-            <a:solidFill>
-              <a:srgbClr val="DB2777"/>
-            </a:solidFill>
-            <a:prstDash val="solid"/>
-          </a:ln>
-        </p:spPr>
-      </p:sp>
-      <p:sp>
-        <p:nvSpPr>
-          <p:cNvPr id="44" name="Text 42"/>
-          <p:cNvSpPr/>
-          <p:nvPr/>
-        </p:nvSpPr>
-        <p:spPr>
-          <a:xfrm>
-            <a:off x="6408638" y="4169664"/>
-            <a:ext cx="685800" cy="384048"/>
-          </a:xfrm>
-          <a:prstGeom prst="rect">
-            <a:avLst/>
-          </a:prstGeom>
-          <a:noFill/>
-          <a:ln/>
-        </p:spPr>
-        <p:txBody>
-          <a:bodyPr wrap="square" lIns="0" tIns="0" rIns="0" bIns="0" rtlCol="0" anchor="ctr"/>
-          <a:lstStyle/>
-          <a:p>
-            <a:pPr algn="ctr" indent="0" marL="0">
-              <a:buNone/>
-            </a:pPr>
-            <a:r>
-              <a:rPr lang="en-US" sz="900" b="1" dirty="0">
-                <a:solidFill>
-                  <a:srgbClr val="9D174D"/>
-                </a:solidFill>
-                <a:latin typeface="Trebuchet MS" pitchFamily="34" charset="0"/>
-                <a:ea typeface="Trebuchet MS" pitchFamily="34" charset="-122"/>
-                <a:cs typeface="Trebuchet MS" pitchFamily="34" charset="-120"/>
-              </a:rPr>
-              <a:t>l</a:t>
-            </a:r>
-            <a:endParaRPr lang="en-US" sz="900" dirty="0"/>
-          </a:p>
-        </p:txBody>
-      </p:sp>
-      <p:sp>
-        <p:nvSpPr>
-          <p:cNvPr id="45" name="Shape 43"/>
-          <p:cNvSpPr/>
-          <p:nvPr/>
-        </p:nvSpPr>
-        <p:spPr>
-          <a:xfrm>
-            <a:off x="7447135" y="4169664"/>
-            <a:ext cx="685800" cy="384048"/>
-          </a:xfrm>
-          <a:prstGeom prst="rect">
-            <a:avLst>
-              <a:gd name="adj" fmla="val 9524"/>
-            </a:avLst>
-          </a:prstGeom>
-          <a:solidFill>
-            <a:srgbClr val="FFFFFF"/>
-          </a:solidFill>
-          <a:ln w="12700">
-            <a:solidFill>
-              <a:srgbClr val="DB2777"/>
-            </a:solidFill>
-            <a:prstDash val="solid"/>
-          </a:ln>
-        </p:spPr>
-      </p:sp>
-      <p:sp>
-        <p:nvSpPr>
-          <p:cNvPr id="46" name="Text 44"/>
-          <p:cNvSpPr/>
-          <p:nvPr/>
-        </p:nvSpPr>
-        <p:spPr>
-          <a:xfrm>
-            <a:off x="7447135" y="4169664"/>
-            <a:ext cx="685800" cy="384048"/>
+          <p:cNvPr id="41" name="Text 39"/>
+          <p:cNvSpPr/>
+          <p:nvPr/>
+        </p:nvSpPr>
+        <p:spPr>
+          <a:xfrm>
+            <a:off x="7031736" y="4169664"/>
+            <a:ext cx="685800" cy="475488"/>
           </a:xfrm>
           <a:prstGeom prst="rect">
             <a:avLst/>
@@ -23600,7 +23312,7 @@
                 <a:ea typeface="Calibri" pitchFamily="34" charset="-122"/>
                 <a:cs typeface="Calibri" pitchFamily="34" charset="-120"/>
               </a:rPr>
-              <a:t>fold, bend, yield</a:t>
+              <a:t>fold, bend, turn</a:t>
             </a:r>
             <a:endParaRPr lang="en-US" sz="850" dirty="0"/>
           </a:p>
@@ -25343,7 +25055,7 @@
                 <a:ea typeface="Calibri" pitchFamily="34" charset="-122"/>
                 <a:cs typeface="Calibri" pitchFamily="34" charset="-120"/>
               </a:rPr>
-              <a:t>fold, bend, yield</a:t>
+              <a:t>fold, bend, turn</a:t>
             </a:r>
             <a:endParaRPr lang="en-US" sz="850" dirty="0"/>
           </a:p>
@@ -26499,7 +26211,7 @@
                 <a:ea typeface="Calibri" pitchFamily="34" charset="-122"/>
                 <a:cs typeface="Calibri" pitchFamily="34" charset="-120"/>
               </a:rPr>
-              <a:t>fold, bend, yield</a:t>
+              <a:t>fold, bend, turn</a:t>
             </a:r>
             <a:endParaRPr lang="en-US" sz="850" dirty="0"/>
           </a:p>
@@ -27617,7 +27329,7 @@
                 <a:ea typeface="Trebuchet MS" pitchFamily="34" charset="-122"/>
                 <a:cs typeface="Trebuchet MS" pitchFamily="34" charset="-120"/>
               </a:rPr>
-              <a:t>apply</a:t>
+              <a:t>imply</a:t>
             </a:r>
             <a:endParaRPr lang="en-US" sz="2800" dirty="0"/>
           </a:p>
@@ -28444,7 +28156,7 @@
                 <a:ea typeface="Trebuchet MS" pitchFamily="34" charset="-122"/>
                 <a:cs typeface="Trebuchet MS" pitchFamily="34" charset="-120"/>
               </a:rPr>
-              <a:t>apply</a:t>
+              <a:t>imply</a:t>
             </a:r>
             <a:endParaRPr lang="en-US" sz="2800" dirty="0"/>
           </a:p>
@@ -28583,7 +28295,7 @@
                 <a:ea typeface="Trebuchet MS" pitchFamily="34" charset="-122"/>
                 <a:cs typeface="Trebuchet MS" pitchFamily="34" charset="-120"/>
               </a:rPr>
-              <a:t>ap</a:t>
+              <a:t>im</a:t>
             </a:r>
             <a:endParaRPr lang="en-US" sz="1300" dirty="0"/>
           </a:p>
@@ -28622,7 +28334,7 @@
                 <a:ea typeface="Calibri" pitchFamily="34" charset="-122"/>
                 <a:cs typeface="Calibri" pitchFamily="34" charset="-120"/>
               </a:rPr>
-              <a:t>to, toward</a:t>
+              <a:t>in, into</a:t>
             </a:r>
             <a:endParaRPr lang="en-US" sz="850" dirty="0"/>
           </a:p>
@@ -28661,7 +28373,7 @@
                 <a:ea typeface="Calibri" pitchFamily="34" charset="-122"/>
                 <a:cs typeface="Calibri" pitchFamily="34" charset="-120"/>
               </a:rPr>
-              <a:t>ad → ap before 'p'</a:t>
+              <a:t>in → im before 'p'</a:t>
             </a:r>
             <a:endParaRPr lang="en-US" sz="700" dirty="0"/>
           </a:p>
@@ -28773,7 +28485,7 @@
                 <a:ea typeface="Calibri" pitchFamily="34" charset="-122"/>
                 <a:cs typeface="Calibri" pitchFamily="34" charset="-120"/>
               </a:rPr>
-              <a:t>fold, bend, yield</a:t>
+              <a:t>fold, bend, turn</a:t>
             </a:r>
             <a:endParaRPr lang="en-US" sz="850" dirty="0"/>
           </a:p>
@@ -29468,7 +29180,7 @@
                 <a:ea typeface="Trebuchet MS" pitchFamily="34" charset="-122"/>
                 <a:cs typeface="Trebuchet MS" pitchFamily="34" charset="-120"/>
               </a:rPr>
-              <a:t>apply</a:t>
+              <a:t>imply</a:t>
             </a:r>
             <a:endParaRPr lang="en-US" sz="2800" dirty="0"/>
           </a:p>
@@ -29607,7 +29319,7 @@
                 <a:ea typeface="Trebuchet MS" pitchFamily="34" charset="-122"/>
                 <a:cs typeface="Trebuchet MS" pitchFamily="34" charset="-120"/>
               </a:rPr>
-              <a:t>ap</a:t>
+              <a:t>im</a:t>
             </a:r>
             <a:endParaRPr lang="en-US" sz="1300" dirty="0"/>
           </a:p>
@@ -29646,7 +29358,7 @@
                 <a:ea typeface="Calibri" pitchFamily="34" charset="-122"/>
                 <a:cs typeface="Calibri" pitchFamily="34" charset="-120"/>
               </a:rPr>
-              <a:t>to, toward</a:t>
+              <a:t>in, into</a:t>
             </a:r>
             <a:endParaRPr lang="en-US" sz="850" dirty="0"/>
           </a:p>
@@ -29685,7 +29397,7 @@
                 <a:ea typeface="Calibri" pitchFamily="34" charset="-122"/>
                 <a:cs typeface="Calibri" pitchFamily="34" charset="-120"/>
               </a:rPr>
-              <a:t>ad → ap before 'p'</a:t>
+              <a:t>in → im before 'p'</a:t>
             </a:r>
             <a:endParaRPr lang="en-US" sz="700" dirty="0"/>
           </a:p>
@@ -29797,7 +29509,7 @@
                 <a:ea typeface="Calibri" pitchFamily="34" charset="-122"/>
                 <a:cs typeface="Calibri" pitchFamily="34" charset="-120"/>
               </a:rPr>
-              <a:t>fold, bend, yield</a:t>
+              <a:t>fold, bend, turn</a:t>
             </a:r>
             <a:endParaRPr lang="en-US" sz="850" dirty="0"/>
           </a:p>
@@ -29956,7 +29668,7 @@
                 <a:ea typeface="Trebuchet MS" pitchFamily="34" charset="-122"/>
                 <a:cs typeface="Trebuchet MS" pitchFamily="34" charset="-120"/>
               </a:rPr>
-              <a:t>ap</a:t>
+              <a:t>im</a:t>
             </a:r>
             <a:endParaRPr lang="en-US" sz="1400" dirty="0"/>
           </a:p>
@@ -30624,7 +30336,7 @@
                 <a:ea typeface="Trebuchet MS" pitchFamily="34" charset="-122"/>
                 <a:cs typeface="Trebuchet MS" pitchFamily="34" charset="-120"/>
               </a:rPr>
-              <a:t>apply</a:t>
+              <a:t>imply</a:t>
             </a:r>
             <a:endParaRPr lang="en-US" sz="2800" dirty="0"/>
           </a:p>
@@ -30763,7 +30475,7 @@
                 <a:ea typeface="Trebuchet MS" pitchFamily="34" charset="-122"/>
                 <a:cs typeface="Trebuchet MS" pitchFamily="34" charset="-120"/>
               </a:rPr>
-              <a:t>ap</a:t>
+              <a:t>im</a:t>
             </a:r>
             <a:endParaRPr lang="en-US" sz="1300" dirty="0"/>
           </a:p>
@@ -30802,7 +30514,7 @@
                 <a:ea typeface="Calibri" pitchFamily="34" charset="-122"/>
                 <a:cs typeface="Calibri" pitchFamily="34" charset="-120"/>
               </a:rPr>
-              <a:t>to, toward</a:t>
+              <a:t>in, into</a:t>
             </a:r>
             <a:endParaRPr lang="en-US" sz="850" dirty="0"/>
           </a:p>
@@ -30841,7 +30553,7 @@
                 <a:ea typeface="Calibri" pitchFamily="34" charset="-122"/>
                 <a:cs typeface="Calibri" pitchFamily="34" charset="-120"/>
               </a:rPr>
-              <a:t>ad → ap before 'p'</a:t>
+              <a:t>in → im before 'p'</a:t>
             </a:r>
             <a:endParaRPr lang="en-US" sz="700" dirty="0"/>
           </a:p>
@@ -30953,7 +30665,7 @@
                 <a:ea typeface="Calibri" pitchFamily="34" charset="-122"/>
                 <a:cs typeface="Calibri" pitchFamily="34" charset="-120"/>
               </a:rPr>
-              <a:t>fold, bend, yield</a:t>
+              <a:t>fold, bend, turn</a:t>
             </a:r>
             <a:endParaRPr lang="en-US" sz="850" dirty="0"/>
           </a:p>
@@ -31112,7 +30824,7 @@
                 <a:ea typeface="Trebuchet MS" pitchFamily="34" charset="-122"/>
                 <a:cs typeface="Trebuchet MS" pitchFamily="34" charset="-120"/>
               </a:rPr>
-              <a:t>ap</a:t>
+              <a:t>im</a:t>
             </a:r>
             <a:endParaRPr lang="en-US" sz="1400" dirty="0"/>
           </a:p>
@@ -31324,7 +31036,7 @@
         </p:nvSpPr>
         <p:spPr>
           <a:xfrm>
-            <a:off x="2670048" y="4169664"/>
+            <a:off x="2427732" y="4169664"/>
             <a:ext cx="685800" cy="475488"/>
           </a:xfrm>
           <a:prstGeom prst="rect">
@@ -31351,7 +31063,7 @@
         </p:nvSpPr>
         <p:spPr>
           <a:xfrm>
-            <a:off x="2670048" y="4169664"/>
+            <a:off x="2427732" y="4169664"/>
             <a:ext cx="685800" cy="475488"/>
           </a:xfrm>
           <a:prstGeom prst="rect">
@@ -31376,7 +31088,7 @@
                 <a:ea typeface="Trebuchet MS" pitchFamily="34" charset="-122"/>
                 <a:cs typeface="Trebuchet MS" pitchFamily="34" charset="-120"/>
               </a:rPr>
-              <a:t>a</a:t>
+              <a:t>i</a:t>
             </a:r>
             <a:endParaRPr lang="en-US" sz="900" dirty="0"/>
           </a:p>
@@ -31390,7 +31102,7 @@
         </p:nvSpPr>
         <p:spPr>
           <a:xfrm>
-            <a:off x="4123944" y="4169664"/>
+            <a:off x="3639312" y="4169664"/>
             <a:ext cx="685800" cy="475488"/>
           </a:xfrm>
           <a:prstGeom prst="rect">
@@ -31417,7 +31129,7 @@
         </p:nvSpPr>
         <p:spPr>
           <a:xfrm>
-            <a:off x="4123944" y="4169664"/>
+            <a:off x="3639312" y="4169664"/>
             <a:ext cx="685800" cy="475488"/>
           </a:xfrm>
           <a:prstGeom prst="rect">
@@ -31442,7 +31154,7 @@
                 <a:ea typeface="Trebuchet MS" pitchFamily="34" charset="-122"/>
                 <a:cs typeface="Trebuchet MS" pitchFamily="34" charset="-120"/>
               </a:rPr>
-              <a:t>pp</a:t>
+              <a:t>m</a:t>
             </a:r>
             <a:endParaRPr lang="en-US" sz="900" dirty="0"/>
           </a:p>
@@ -31456,7 +31168,7 @@
         </p:nvSpPr>
         <p:spPr>
           <a:xfrm>
-            <a:off x="5577840" y="4169664"/>
+            <a:off x="4850892" y="4169664"/>
             <a:ext cx="685800" cy="475488"/>
           </a:xfrm>
           <a:prstGeom prst="rect">
@@ -31483,7 +31195,7 @@
         </p:nvSpPr>
         <p:spPr>
           <a:xfrm>
-            <a:off x="5577840" y="4169664"/>
+            <a:off x="4850892" y="4169664"/>
             <a:ext cx="685800" cy="475488"/>
           </a:xfrm>
           <a:prstGeom prst="rect">
@@ -31508,7 +31220,7 @@
                 <a:ea typeface="Trebuchet MS" pitchFamily="34" charset="-122"/>
                 <a:cs typeface="Trebuchet MS" pitchFamily="34" charset="-120"/>
               </a:rPr>
-              <a:t>l</a:t>
+              <a:t>p</a:t>
             </a:r>
             <a:endParaRPr lang="en-US" sz="900" dirty="0"/>
           </a:p>
@@ -31522,7 +31234,7 @@
         </p:nvSpPr>
         <p:spPr>
           <a:xfrm>
-            <a:off x="7031736" y="4169664"/>
+            <a:off x="6062472" y="4169664"/>
             <a:ext cx="685800" cy="475488"/>
           </a:xfrm>
           <a:prstGeom prst="rect">
@@ -31549,7 +31261,73 @@
         </p:nvSpPr>
         <p:spPr>
           <a:xfrm>
-            <a:off x="7031736" y="4169664"/>
+            <a:off x="6062472" y="4169664"/>
+            <a:ext cx="685800" cy="475488"/>
+          </a:xfrm>
+          <a:prstGeom prst="rect">
+            <a:avLst/>
+          </a:prstGeom>
+          <a:noFill/>
+          <a:ln/>
+        </p:spPr>
+        <p:txBody>
+          <a:bodyPr wrap="square" lIns="0" tIns="0" rIns="0" bIns="0" rtlCol="0" anchor="ctr"/>
+          <a:lstStyle/>
+          <a:p>
+            <a:pPr algn="ctr" indent="0" marL="0">
+              <a:buNone/>
+            </a:pPr>
+            <a:r>
+              <a:rPr lang="en-US" sz="900" b="1" dirty="0">
+                <a:solidFill>
+                  <a:srgbClr val="9D174D"/>
+                </a:solidFill>
+                <a:latin typeface="Trebuchet MS" pitchFamily="34" charset="0"/>
+                <a:ea typeface="Trebuchet MS" pitchFamily="34" charset="-122"/>
+                <a:cs typeface="Trebuchet MS" pitchFamily="34" charset="-120"/>
+              </a:rPr>
+              <a:t>l</a:t>
+            </a:r>
+            <a:endParaRPr lang="en-US" sz="900" dirty="0"/>
+          </a:p>
+        </p:txBody>
+      </p:sp>
+      <p:sp>
+        <p:nvSpPr>
+          <p:cNvPr id="42" name="Shape 40"/>
+          <p:cNvSpPr/>
+          <p:nvPr/>
+        </p:nvSpPr>
+        <p:spPr>
+          <a:xfrm>
+            <a:off x="7274052" y="4169664"/>
+            <a:ext cx="685800" cy="475488"/>
+          </a:xfrm>
+          <a:prstGeom prst="rect">
+            <a:avLst>
+              <a:gd name="adj" fmla="val 7692"/>
+            </a:avLst>
+          </a:prstGeom>
+          <a:solidFill>
+            <a:srgbClr val="FFFFFF"/>
+          </a:solidFill>
+          <a:ln w="12700">
+            <a:solidFill>
+              <a:srgbClr val="DB2777"/>
+            </a:solidFill>
+            <a:prstDash val="solid"/>
+          </a:ln>
+        </p:spPr>
+      </p:sp>
+      <p:sp>
+        <p:nvSpPr>
+          <p:cNvPr id="43" name="Text 41"/>
+          <p:cNvSpPr/>
+          <p:nvPr/>
+        </p:nvSpPr>
+        <p:spPr>
+          <a:xfrm>
+            <a:off x="7274052" y="4169664"/>
             <a:ext cx="685800" cy="475488"/>
           </a:xfrm>
           <a:prstGeom prst="rect">
@@ -33528,7 +33306,7 @@
                 <a:ea typeface="Trebuchet MS" pitchFamily="34" charset="-122"/>
                 <a:cs typeface="Trebuchet MS" pitchFamily="34" charset="-120"/>
               </a:rPr>
-              <a:t>im-</a:t>
+              <a:t>com-</a:t>
             </a:r>
             <a:endParaRPr lang="en-US" sz="1300" dirty="0"/>
           </a:p>
@@ -33681,7 +33459,7 @@
                 <a:ea typeface="Trebuchet MS" pitchFamily="34" charset="-122"/>
                 <a:cs typeface="Trebuchet MS" pitchFamily="34" charset="-120"/>
               </a:rPr>
-              <a:t>com-</a:t>
+              <a:t>im-</a:t>
             </a:r>
             <a:endParaRPr lang="en-US" sz="1300" dirty="0"/>
           </a:p>
@@ -33923,7 +33701,7 @@
                 <a:ea typeface="Trebuchet MS" pitchFamily="34" charset="-122"/>
                 <a:cs typeface="Trebuchet MS" pitchFamily="34" charset="-120"/>
               </a:rPr>
-              <a:t>-ance</a:t>
+              <a:t>-ment</a:t>
             </a:r>
             <a:endParaRPr lang="en-US" sz="1300" dirty="0"/>
           </a:p>
@@ -34076,7 +33854,7 @@
                 <a:ea typeface="Trebuchet MS" pitchFamily="34" charset="-122"/>
                 <a:cs typeface="Trebuchet MS" pitchFamily="34" charset="-120"/>
               </a:rPr>
-              <a:t>-ment</a:t>
+              <a:t>-s</a:t>
             </a:r>
             <a:endParaRPr lang="en-US" sz="1300" dirty="0"/>
           </a:p>
@@ -34247,7 +34025,7 @@
                 <a:ea typeface="Trebuchet MS" pitchFamily="34" charset="-122"/>
                 <a:cs typeface="Trebuchet MS" pitchFamily="34" charset="-120"/>
               </a:rPr>
-              <a:t>imply</a:t>
+              <a:t>comply</a:t>
             </a:r>
             <a:endParaRPr lang="en-US" sz="1200" dirty="0"/>
           </a:p>
@@ -34313,7 +34091,7 @@
                 <a:ea typeface="Trebuchet MS" pitchFamily="34" charset="-122"/>
                 <a:cs typeface="Trebuchet MS" pitchFamily="34" charset="-120"/>
               </a:rPr>
-              <a:t>comply</a:t>
+              <a:t>imply</a:t>
             </a:r>
             <a:endParaRPr lang="en-US" sz="1200" dirty="0"/>
           </a:p>
@@ -34511,7 +34289,7 @@
                 <a:ea typeface="Trebuchet MS" pitchFamily="34" charset="-122"/>
                 <a:cs typeface="Trebuchet MS" pitchFamily="34" charset="-120"/>
               </a:rPr>
-              <a:t>multiply</a:t>
+              <a:t>plywood</a:t>
             </a:r>
             <a:endParaRPr lang="en-US" sz="1200" dirty="0"/>
           </a:p>
@@ -34577,7 +34355,7 @@
                 <a:ea typeface="Trebuchet MS" pitchFamily="34" charset="-122"/>
                 <a:cs typeface="Trebuchet MS" pitchFamily="34" charset="-120"/>
               </a:rPr>
-              <a:t>simply</a:t>
+              <a:t>multiply</a:t>
             </a:r>
             <a:endParaRPr lang="en-US" sz="1200" dirty="0"/>
           </a:p>
@@ -34643,7 +34421,7 @@
                 <a:ea typeface="Trebuchet MS" pitchFamily="34" charset="-122"/>
                 <a:cs typeface="Trebuchet MS" pitchFamily="34" charset="-120"/>
               </a:rPr>
-              <a:t>plywood</a:t>
+              <a:t>simply</a:t>
             </a:r>
             <a:endParaRPr lang="en-US" sz="1200" dirty="0"/>
           </a:p>
@@ -35831,7 +35609,7 @@
                 <a:ea typeface="Calibri" pitchFamily="34" charset="-122"/>
                 <a:cs typeface="Calibri" pitchFamily="34" charset="-120"/>
               </a:rPr>
-              <a:t>1.  The root 'ply' comes from a Latin word meaning to fold or bend.</a:t>
+              <a:t>1.  The word 'supply' contains the root 'ply'.</a:t>
             </a:r>
             <a:endParaRPr lang="en-US" sz="1300" dirty="0"/>
           </a:p>
@@ -35970,7 +35748,7 @@
                 <a:ea typeface="Calibri" pitchFamily="34" charset="-122"/>
                 <a:cs typeface="Calibri" pitchFamily="34" charset="-120"/>
               </a:rPr>
-              <a:t>2.  The word 'reply' means to ignore someone who has spoken to you.</a:t>
+              <a:t>2.  'Comply' means to follow a rule or do what is asked.</a:t>
             </a:r>
             <a:endParaRPr lang="en-US" sz="1300" dirty="0"/>
           </a:p>
@@ -35993,11 +35771,11 @@
             </a:avLst>
           </a:prstGeom>
           <a:solidFill>
-            <a:srgbClr val="FEE2E2"/>
-          </a:solidFill>
-          <a:ln w="12700">
-            <a:solidFill>
-              <a:srgbClr val="DC2626"/>
+            <a:srgbClr val="DCFCE7"/>
+          </a:solidFill>
+          <a:ln w="12700">
+            <a:solidFill>
+              <a:srgbClr val="16A34A"/>
             </a:solidFill>
             <a:prstDash val="solid"/>
           </a:ln>
@@ -36030,13 +35808,13 @@
             <a:r>
               <a:rPr lang="en-US" sz="1100" b="1" dirty="0">
                 <a:solidFill>
-                  <a:srgbClr val="DC2626"/>
+                  <a:srgbClr val="16A34A"/>
                 </a:solidFill>
                 <a:latin typeface="Trebuchet MS" pitchFamily="34" charset="0"/>
                 <a:ea typeface="Trebuchet MS" pitchFamily="34" charset="-122"/>
                 <a:cs typeface="Trebuchet MS" pitchFamily="34" charset="-120"/>
               </a:rPr>
-              <a:t>FALSE</a:t>
+              <a:t>TRUE</a:t>
             </a:r>
             <a:endParaRPr lang="en-US" sz="1100" dirty="0"/>
           </a:p>
@@ -36109,7 +35887,7 @@
                 <a:ea typeface="Calibri" pitchFamily="34" charset="-122"/>
                 <a:cs typeface="Calibri" pitchFamily="34" charset="-120"/>
               </a:rPr>
-              <a:t>3.  Plywood is named after 'ply' because it is made of many folded or layered sheets of wood.</a:t>
+              <a:t>3.  The word 'reply' has nothing to do with the root 'ply'.</a:t>
             </a:r>
             <a:endParaRPr lang="en-US" sz="1300" dirty="0"/>
           </a:p>
@@ -36132,11 +35910,11 @@
             </a:avLst>
           </a:prstGeom>
           <a:solidFill>
-            <a:srgbClr val="DCFCE7"/>
-          </a:solidFill>
-          <a:ln w="12700">
-            <a:solidFill>
-              <a:srgbClr val="16A34A"/>
+            <a:srgbClr val="FEE2E2"/>
+          </a:solidFill>
+          <a:ln w="12700">
+            <a:solidFill>
+              <a:srgbClr val="DC2626"/>
             </a:solidFill>
             <a:prstDash val="solid"/>
           </a:ln>
@@ -36169,13 +35947,13 @@
             <a:r>
               <a:rPr lang="en-US" sz="1100" b="1" dirty="0">
                 <a:solidFill>
-                  <a:srgbClr val="16A34A"/>
+                  <a:srgbClr val="DC2626"/>
                 </a:solidFill>
                 <a:latin typeface="Trebuchet MS" pitchFamily="34" charset="0"/>
                 <a:ea typeface="Trebuchet MS" pitchFamily="34" charset="-122"/>
                 <a:cs typeface="Trebuchet MS" pitchFamily="34" charset="-120"/>
               </a:rPr>
-              <a:t>TRUE</a:t>
+              <a:t>FALSE</a:t>
             </a:r>
             <a:endParaRPr lang="en-US" sz="1100" dirty="0"/>
           </a:p>
@@ -36248,7 +36026,7 @@
                 <a:ea typeface="Calibri" pitchFamily="34" charset="-122"/>
                 <a:cs typeface="Calibri" pitchFamily="34" charset="-120"/>
               </a:rPr>
-              <a:t>4.  The word 'comply' contains the root 'ply' and means to follow rules or instructions.</a:t>
+              <a:t>4.  The root 'ply' comes from a Latin word meaning to fold or bend.</a:t>
             </a:r>
             <a:endParaRPr lang="en-US" sz="1300" dirty="0"/>
           </a:p>
@@ -36387,7 +36165,7 @@
                 <a:ea typeface="Calibri" pitchFamily="34" charset="-122"/>
                 <a:cs typeface="Calibri" pitchFamily="34" charset="-120"/>
               </a:rPr>
-              <a:t>5.  The prefix 'im' in 'imply' means 'against' or 'not'.</a:t>
+              <a:t>5.  The root 'ply' means to push or throw something.</a:t>
             </a:r>
             <a:endParaRPr lang="en-US" sz="1300" dirty="0"/>
           </a:p>
@@ -37092,7 +36870,7 @@
                 <a:ea typeface="Trebuchet MS" pitchFamily="34" charset="-122"/>
                 <a:cs typeface="Trebuchet MS" pitchFamily="34" charset="-120"/>
               </a:rPr>
-              <a:t>imply</a:t>
+              <a:t>comply</a:t>
             </a:r>
             <a:endParaRPr lang="en-US" sz="1300" dirty="0"/>
           </a:p>
@@ -37158,7 +36936,7 @@
                 <a:ea typeface="Trebuchet MS" pitchFamily="34" charset="-122"/>
                 <a:cs typeface="Trebuchet MS" pitchFamily="34" charset="-120"/>
               </a:rPr>
-              <a:t>comply</a:t>
+              <a:t>imply</a:t>
             </a:r>
             <a:endParaRPr lang="en-US" sz="1300" dirty="0"/>
           </a:p>
@@ -37356,7 +37134,7 @@
                 <a:ea typeface="Trebuchet MS" pitchFamily="34" charset="-122"/>
                 <a:cs typeface="Trebuchet MS" pitchFamily="34" charset="-120"/>
               </a:rPr>
-              <a:t>multiply</a:t>
+              <a:t>plywood</a:t>
             </a:r>
             <a:endParaRPr lang="en-US" sz="1300" dirty="0"/>
           </a:p>
@@ -37422,7 +37200,7 @@
                 <a:ea typeface="Trebuchet MS" pitchFamily="34" charset="-122"/>
                 <a:cs typeface="Trebuchet MS" pitchFamily="34" charset="-120"/>
               </a:rPr>
-              <a:t>simply</a:t>
+              <a:t>multiply</a:t>
             </a:r>
             <a:endParaRPr lang="en-US" sz="1300" dirty="0"/>
           </a:p>
@@ -38207,7 +37985,7 @@
                 <a:ea typeface="Trebuchet MS" pitchFamily="34" charset="-122"/>
                 <a:cs typeface="Trebuchet MS" pitchFamily="34" charset="-120"/>
               </a:rPr>
-              <a:t>im-</a:t>
+              <a:t>com-</a:t>
             </a:r>
             <a:endParaRPr lang="en-US" sz="1300" dirty="0"/>
           </a:p>
@@ -38360,7 +38138,7 @@
                 <a:ea typeface="Trebuchet MS" pitchFamily="34" charset="-122"/>
                 <a:cs typeface="Trebuchet MS" pitchFamily="34" charset="-120"/>
               </a:rPr>
-              <a:t>com-</a:t>
+              <a:t>im-</a:t>
             </a:r>
             <a:endParaRPr lang="en-US" sz="1300" dirty="0"/>
           </a:p>
@@ -38602,7 +38380,7 @@
                 <a:ea typeface="Trebuchet MS" pitchFamily="34" charset="-122"/>
                 <a:cs typeface="Trebuchet MS" pitchFamily="34" charset="-120"/>
               </a:rPr>
-              <a:t>-ance</a:t>
+              <a:t>-ment</a:t>
             </a:r>
             <a:endParaRPr lang="en-US" sz="1300" dirty="0"/>
           </a:p>
@@ -38755,7 +38533,7 @@
                 <a:ea typeface="Trebuchet MS" pitchFamily="34" charset="-122"/>
                 <a:cs typeface="Trebuchet MS" pitchFamily="34" charset="-120"/>
               </a:rPr>
-              <a:t>-ment</a:t>
+              <a:t>-s</a:t>
             </a:r>
             <a:endParaRPr lang="en-US" sz="1300" dirty="0"/>
           </a:p>
@@ -39666,7 +39444,7 @@
                 <a:ea typeface="Calibri" pitchFamily="34" charset="-122"/>
                 <a:cs typeface="Calibri" pitchFamily="34" charset="-120"/>
               </a:rPr>
-              <a:t>To follow rules or do what someone asks you to do.</a:t>
+              <a:t>To suggest something without saying it directly.</a:t>
             </a:r>
             <a:endParaRPr lang="en-US" sz="1200" dirty="0"/>
           </a:p>
@@ -39739,7 +39517,7 @@
                 <a:ea typeface="Trebuchet MS" pitchFamily="34" charset="-122"/>
                 <a:cs typeface="Trebuchet MS" pitchFamily="34" charset="-120"/>
               </a:rPr>
-              <a:t>imply</a:t>
+              <a:t>comply</a:t>
             </a:r>
             <a:endParaRPr lang="en-US" sz="1200" dirty="0"/>
           </a:p>
@@ -39805,7 +39583,7 @@
                 <a:ea typeface="Calibri" pitchFamily="34" charset="-122"/>
                 <a:cs typeface="Calibri" pitchFamily="34" charset="-120"/>
               </a:rPr>
-              <a:t>To put something to use, or to ask formally for something like a job or school place.</a:t>
+              <a:t>To put something on a surface, or to ask for something formally.</a:t>
             </a:r>
             <a:endParaRPr lang="en-US" sz="1200" dirty="0"/>
           </a:p>
@@ -39878,7 +39656,7 @@
                 <a:ea typeface="Trebuchet MS" pitchFamily="34" charset="-122"/>
                 <a:cs typeface="Trebuchet MS" pitchFamily="34" charset="-120"/>
               </a:rPr>
-              <a:t>comply</a:t>
+              <a:t>imply</a:t>
             </a:r>
             <a:endParaRPr lang="en-US" sz="1200" dirty="0"/>
           </a:p>
@@ -39944,7 +39722,7 @@
                 <a:ea typeface="Calibri" pitchFamily="34" charset="-122"/>
                 <a:cs typeface="Calibri" pitchFamily="34" charset="-120"/>
               </a:rPr>
-              <a:t>To answer or respond to someone who has spoken or written to you.</a:t>
+              <a:t>To answer someone who has spoken or written to you.</a:t>
             </a:r>
             <a:endParaRPr lang="en-US" sz="1200" dirty="0"/>
           </a:p>
@@ -40083,7 +39861,7 @@
                 <a:ea typeface="Calibri" pitchFamily="34" charset="-122"/>
                 <a:cs typeface="Calibri" pitchFamily="34" charset="-120"/>
               </a:rPr>
-              <a:t>To increase a number by adding it to itself a certain number of times.</a:t>
+              <a:t>A strong board made from thin layers of wood glued together.</a:t>
             </a:r>
             <a:endParaRPr lang="en-US" sz="1200" dirty="0"/>
           </a:p>
@@ -40222,7 +40000,7 @@
                 <a:ea typeface="Calibri" pitchFamily="34" charset="-122"/>
                 <a:cs typeface="Calibri" pitchFamily="34" charset="-120"/>
               </a:rPr>
-              <a:t>In an easy or plain way, without any complications.</a:t>
+              <a:t>To increase a number by adding it to itself a certain number of times.</a:t>
             </a:r>
             <a:endParaRPr lang="en-US" sz="1200" dirty="0"/>
           </a:p>
@@ -40295,7 +40073,7 @@
                 <a:ea typeface="Trebuchet MS" pitchFamily="34" charset="-122"/>
                 <a:cs typeface="Trebuchet MS" pitchFamily="34" charset="-120"/>
               </a:rPr>
-              <a:t>multiply</a:t>
+              <a:t>plywood</a:t>
             </a:r>
             <a:endParaRPr lang="en-US" sz="1200" dirty="0"/>
           </a:p>
@@ -40361,7 +40139,7 @@
                 <a:ea typeface="Calibri" pitchFamily="34" charset="-122"/>
                 <a:cs typeface="Calibri" pitchFamily="34" charset="-120"/>
               </a:rPr>
-              <a:t>To give or provide things that are needed.</a:t>
+              <a:t>To provide people with something they need.</a:t>
             </a:r>
             <a:endParaRPr lang="en-US" sz="1200" dirty="0"/>
           </a:p>
@@ -40434,7 +40212,7 @@
                 <a:ea typeface="Trebuchet MS" pitchFamily="34" charset="-122"/>
                 <a:cs typeface="Trebuchet MS" pitchFamily="34" charset="-120"/>
               </a:rPr>
-              <a:t>simply</a:t>
+              <a:t>multiply</a:t>
             </a:r>
             <a:endParaRPr lang="en-US" sz="1200" dirty="0"/>
           </a:p>
@@ -40500,7 +40278,7 @@
                 <a:ea typeface="Calibri" pitchFamily="34" charset="-122"/>
                 <a:cs typeface="Calibri" pitchFamily="34" charset="-120"/>
               </a:rPr>
-              <a:t>To suggest something without saying it directly.</a:t>
+              <a:t>To follow a rule or do what someone asks you to do.</a:t>
             </a:r>
             <a:endParaRPr lang="en-US" sz="1200" dirty="0"/>
           </a:p>
@@ -40995,7 +40773,7 @@
                 <a:ea typeface="Calibri" pitchFamily="34" charset="-122"/>
                 <a:cs typeface="Calibri" pitchFamily="34" charset="-120"/>
               </a:rPr>
-              <a:t>The teacher asked every student to comply with the classroom rules during the excursion.</a:t>
+              <a:t>The teacher asked everyone to comply with the classroom rules during the test.</a:t>
             </a:r>
             <a:endParaRPr lang="en-US" sz="1500" dirty="0"/>
           </a:p>
@@ -41159,7 +40937,7 @@
                 <a:ea typeface="Calibri" pitchFamily="34" charset="-122"/>
                 <a:cs typeface="Calibri" pitchFamily="34" charset="-120"/>
               </a:rPr>
-              <a:t>We need to apply sunscreen before going outside to play in the Australian sun.</a:t>
+              <a:t>We need to apply sunscreen before we go outside to play.</a:t>
             </a:r>
             <a:endParaRPr lang="en-US" sz="1500" dirty="0"/>
           </a:p>
@@ -41323,7 +41101,7 @@
                 <a:ea typeface="Calibri" pitchFamily="34" charset="-122"/>
                 <a:cs typeface="Calibri" pitchFamily="34" charset="-120"/>
               </a:rPr>
-              <a:t>The school library can supply plenty of books if you simply ask the librarian for help.</a:t>
+              <a:t>The factory can supply enough timber for all the new houses being built.</a:t>
             </a:r>
             <a:endParaRPr lang="en-US" sz="1500" dirty="0"/>
           </a:p>
